--- a/curso/pptx/S79.pptx
+++ b/curso/pptx/S79.pptx
@@ -3904,7 +3904,7 @@
                 </a:solidFill>
                 <a:latin typeface="Nunito Sans"/>
               </a:rPr>
-              <a:t>Iker escribe a su novia Leire cada hora: «¿Dónde estás? ¿Con quién? Mándame la ubicación». Y añade: «Es porque me preocupo por ti». (Ejemplo inventado.)</a:t>
+              <a:t>Un chico escribe a su novia cada hora: «¿Dónde estás? ¿Con quién? Mándame la ubicación». Y añade: «Es porque me preocupo por ti». (Ejemplo inventado.)</a:t>
             </a:r>
           </a:p>
         </p:txBody>
@@ -3952,7 +3952,7 @@
                 </a:solidFill>
                 <a:latin typeface="Nunito Sans"/>
               </a:rPr>
-              <a:t>¿Qué dice Iker? Que es preocupación, cariño.</a:t>
+              <a:t>¿Qué dice el chico? Que es preocupación, cariño.</a:t>
             </a:r>
           </a:p>
           <a:p>
@@ -3977,7 +3977,7 @@
                 </a:solidFill>
                 <a:latin typeface="Nunito Sans"/>
               </a:rPr>
-              <a:t>¿Qué hace? Vigila dónde está Leire y con quién, a todas horas.</a:t>
+              <a:t>¿Qué hace? Vigila dónde está ella y con quién, a todas horas.</a:t>
             </a:r>
           </a:p>
           <a:p>
@@ -4231,7 +4231,7 @@
                 </a:solidFill>
                 <a:latin typeface="Nunito Sans"/>
               </a:rPr>
-              <a:t>Naiara ve que su novio Omar se ríe mucho con una compañera. Siente celos. (Ejemplo inventado.)</a:t>
+              <a:t>Una chica ve que su novio se ríe mucho con una compañera. Siente celos. (Ejemplo inventado.)</a:t>
             </a:r>
           </a:p>
         </p:txBody>
@@ -4304,7 +4304,7 @@
                 </a:solidFill>
                 <a:latin typeface="Nunito Sans"/>
               </a:rPr>
-              <a:t>Lo que Naiara haga con ellos es otra cosa: puede hablarlo con calma, o vigilar y prohibir.</a:t>
+              <a:t>Lo que ella haga con ellos es otra cosa: puede hablarlo con calma, o vigilar y prohibir.</a:t>
             </a:r>
           </a:p>
           <a:p>
@@ -5049,7 +5049,7 @@
                 </a:solidFill>
                 <a:latin typeface="Nunito Sans"/>
               </a:rPr>
-              <a:t>Yasmin y Chen llevan un año juntos. No se revisan el móvil ni se piden contraseñas. Maialen opina: «Eso es que no confían el uno en el otro».</a:t>
+              <a:t>Una chica y un chico llevan un año juntos. No se revisan el móvil ni se piden contraseñas. Una amiga opina: «Eso es que no confían el uno en el otro».</a:t>
             </a:r>
           </a:p>
         </p:txBody>
@@ -5097,7 +5097,7 @@
                 </a:solidFill>
                 <a:latin typeface="Nunito Sans"/>
               </a:rPr>
-              <a:t>¿Tiene razón Maialen?</a:t>
+              <a:t>¿Tiene razón esa amiga?</a:t>
             </a:r>
           </a:p>
           <a:p>
@@ -5190,7 +5190,7 @@
                 </a:solidFill>
                 <a:latin typeface="Nunito Sans"/>
               </a:rPr>
-              <a:t>¿Cómo lo sabe Maialen? Saca su conclusión de un dato que apunta a lo contrario. Y la intimidad es un derecho.</a:t>
+              <a:t>¿Cómo lo sabe? Saca su conclusión de un dato que apunta a lo contrario. Y la intimidad es un derecho.</a:t>
             </a:r>
           </a:p>
           <a:p>

--- a/curso/pptx/S79.pptx
+++ b/curso/pptx/S79.pptx
@@ -22,7 +22,6 @@
     <p:sldId id="270" r:id="rId22"/>
     <p:sldId id="271" r:id="rId23"/>
     <p:sldId id="272" r:id="rId24"/>
-    <p:sldId id="273" r:id="rId25"/>
   </p:sldIdLst>
   <p:sldSz cx="12192000" cy="6858000" type="screen4x3"/>
   <p:notesSz cx="6858000" cy="9144000"/>
@@ -3536,7 +3535,7 @@
                 </a:solidFill>
                 <a:latin typeface="Nunito Sans"/>
               </a:rPr>
-              <a:t>PENSAMIENTO CRÍTICO · SESIÓN 79 · UNIDAD 17 · AMISTAD, AMOR Y FAMILIAS</a:t>
+              <a:t>PENSAMIENTO CRÍTICO · SESIÓN 79 · UNIDAD 17 · DIFERENTES, PERO IGUALES</a:t>
             </a:r>
           </a:p>
         </p:txBody>
@@ -3575,7 +3574,7 @@
                 </a:solidFill>
                 <a:latin typeface="Fredoka"/>
               </a:rPr>
-              <a:t>Los mitos del amor romántico</a:t>
+              <a:t>La desigualdad de género</a:t>
             </a:r>
           </a:p>
         </p:txBody>
@@ -3614,7 +3613,7 @@
                 </a:solidFill>
                 <a:latin typeface="Nunito Sans"/>
               </a:rPr>
-              <a:t>Los mitos del amor romántico son creencias falsas o exageradas sobre el amor, como que los celos prueban amor; pueden disfrazar el control de cariño.</a:t>
+              <a:t>Ser diferentes no es lo mismo que ser desiguales; los datos muestran desigualdades de género, y cada diferencia pide preguntar por qué.</a:t>
             </a:r>
           </a:p>
         </p:txBody>
@@ -3718,7 +3717,7 @@
                 </a:solidFill>
                 <a:latin typeface="Fredoka"/>
               </a:rPr>
-              <a:t>Casos resueltos</a:t>
+              <a:t>Leer bien los datos</a:t>
             </a:r>
           </a:p>
         </p:txBody>
@@ -3783,7 +3782,7 @@
                 </a:solidFill>
                 <a:latin typeface="Nunito Sans"/>
               </a:rPr>
-              <a:t>BLOQUE 2 · CASOS RESUELTOS</a:t>
+              <a:t>BLOQUE 2 · LEER BIEN LOS DATOS</a:t>
             </a:r>
           </a:p>
         </p:txBody>
@@ -3822,7 +3821,7 @@
                 </a:solidFill>
                 <a:latin typeface="Fredoka"/>
               </a:rPr>
-              <a:t>Caso 1 · «Mándame la ubicación»</a:t>
+              <a:t>Caso 1 · ¿Cobran menos por el mismo trabajo?</a:t>
             </a:r>
           </a:p>
         </p:txBody>
@@ -3904,7 +3903,7 @@
                 </a:solidFill>
                 <a:latin typeface="Nunito Sans"/>
               </a:rPr>
-              <a:t>Un chico escribe a su novia cada hora: «¿Dónde estás? ¿Con quién? Mándame la ubicación». Y añade: «Es porque me preocupo por ti». (Ejemplo inventado.)</a:t>
+              <a:t>Una chica lee: «Las mujeres cobran de media menos que los hombres». Concluye: «Entonces a mi madre le pagan menos que a su compañero por hacer lo mismo».</a:t>
             </a:r>
           </a:p>
         </p:txBody>
@@ -3952,7 +3951,43 @@
                 </a:solidFill>
                 <a:latin typeface="Nunito Sans"/>
               </a:rPr>
-              <a:t>¿Qué dice el chico? Que es preocupación, cariño.</a:t>
+              <a:t>La media compara a </a:t>
+            </a:r>
+            <a:r>
+              <a:rPr sz="2400" b="1">
+                <a:solidFill>
+                  <a:srgbClr val="1F2A44"/>
+                </a:solidFill>
+                <a:latin typeface="Nunito Sans"/>
+              </a:rPr>
+              <a:t>todas</a:t>
+            </a:r>
+            <a:r>
+              <a:rPr sz="2400" b="0">
+                <a:solidFill>
+                  <a:srgbClr val="1F2A44"/>
+                </a:solidFill>
+                <a:latin typeface="Nunito Sans"/>
+              </a:rPr>
+              <a:t> las mujeres con </a:t>
+            </a:r>
+            <a:r>
+              <a:rPr sz="2400" b="1">
+                <a:solidFill>
+                  <a:srgbClr val="1F2A44"/>
+                </a:solidFill>
+                <a:latin typeface="Nunito Sans"/>
+              </a:rPr>
+              <a:t>todos</a:t>
+            </a:r>
+            <a:r>
+              <a:rPr sz="2400" b="0">
+                <a:solidFill>
+                  <a:srgbClr val="1F2A44"/>
+                </a:solidFill>
+                <a:latin typeface="Nunito Sans"/>
+              </a:rPr>
+              <a:t> los hombres, no el mismo puesto (sesión 91).</a:t>
             </a:r>
           </a:p>
           <a:p>
@@ -3977,7 +4012,25 @@
                 </a:solidFill>
                 <a:latin typeface="Nunito Sans"/>
               </a:rPr>
-              <a:t>¿Qué hace? Vigila dónde está ella y con quién, a todas horas.</a:t>
+              <a:t>Pagar distinto por el mismo trabajo está </a:t>
+            </a:r>
+            <a:r>
+              <a:rPr sz="2400" b="1">
+                <a:solidFill>
+                  <a:srgbClr val="1F2A44"/>
+                </a:solidFill>
+                <a:latin typeface="Nunito Sans"/>
+              </a:rPr>
+              <a:t>prohibido</a:t>
+            </a:r>
+            <a:r>
+              <a:rPr sz="2400" b="0">
+                <a:solidFill>
+                  <a:srgbClr val="1F2A44"/>
+                </a:solidFill>
+                <a:latin typeface="Nunito Sans"/>
+              </a:rPr>
+              <a:t> por ley en España. Si pasa, se puede denunciar.</a:t>
             </a:r>
           </a:p>
           <a:p>
@@ -4002,7 +4055,7 @@
                 </a:solidFill>
                 <a:latin typeface="Nunito Sans"/>
               </a:rPr>
-              <a:t>¿Cómo lo sé? Miro los hechos, no la etiqueta. Preocuparse alguna vez no es vigilar cada hora.</a:t>
+              <a:t>La diferencia de media sale de varias causas: más jornada parcial, trabajos peor pagados, parones para cuidar… y a veces discriminación.</a:t>
             </a:r>
           </a:p>
           <a:p>
@@ -4027,25 +4080,7 @@
                 </a:solidFill>
                 <a:latin typeface="Nunito Sans"/>
               </a:rPr>
-              <a:t>Conclusión: es </a:t>
-            </a:r>
-            <a:r>
-              <a:rPr sz="2400" b="1">
-                <a:solidFill>
-                  <a:srgbClr val="1F2A44"/>
-                </a:solidFill>
-                <a:latin typeface="Nunito Sans"/>
-              </a:rPr>
-              <a:t>control</a:t>
-            </a:r>
-            <a:r>
-              <a:rPr sz="2400" b="0">
-                <a:solidFill>
-                  <a:srgbClr val="1F2A44"/>
-                </a:solidFill>
-                <a:latin typeface="Nunito Sans"/>
-              </a:rPr>
-              <a:t> disfrazado de cariño. Llamarlo amor no lo convierte en amor.</a:t>
+              <a:t>Conclusión: el dato es real y muestra desigualdad. Pero no dice qué pasa en un caso concreto.</a:t>
             </a:r>
           </a:p>
         </p:txBody>
@@ -4110,7 +4145,7 @@
                 </a:solidFill>
                 <a:latin typeface="Nunito Sans"/>
               </a:rPr>
-              <a:t>BLOQUE 2 · CASOS RESUELTOS</a:t>
+              <a:t>BLOQUE 2 · LEER BIEN LOS DATOS</a:t>
             </a:r>
           </a:p>
         </p:txBody>
@@ -4149,7 +4184,7 @@
                 </a:solidFill>
                 <a:latin typeface="Fredoka"/>
               </a:rPr>
-              <a:t>Caso 2 · Sentir celos y usar los celos</a:t>
+              <a:t>Caso 2 · Una diferencia pide un porqué</a:t>
             </a:r>
           </a:p>
         </p:txBody>
@@ -4231,7 +4266,7 @@
                 </a:solidFill>
                 <a:latin typeface="Nunito Sans"/>
               </a:rPr>
-              <a:t>Una chica ve que su novio se ríe mucho con una compañera. Siente celos. (Ejemplo inventado.)</a:t>
+              <a:t>En un instituto, 9 de cada 10 alumnos del ciclo de Informática son chicos (ejemplo inventado).</a:t>
             </a:r>
           </a:p>
         </p:txBody>
@@ -4279,7 +4314,25 @@
                 </a:solidFill>
                 <a:latin typeface="Nunito Sans"/>
               </a:rPr>
-              <a:t>Sentir celos alguna vez es humano: es una emoción, no un delito.</a:t>
+              <a:t>El dato no se explica solo. Como en las sesiones 28 y 90: ¿cuál es la </a:t>
+            </a:r>
+            <a:r>
+              <a:rPr sz="2400" b="1">
+                <a:solidFill>
+                  <a:srgbClr val="1F2A44"/>
+                </a:solidFill>
+                <a:latin typeface="Nunito Sans"/>
+              </a:rPr>
+              <a:t>causa</a:t>
+            </a:r>
+            <a:r>
+              <a:rPr sz="2400" b="0">
+                <a:solidFill>
+                  <a:srgbClr val="1F2A44"/>
+                </a:solidFill>
+                <a:latin typeface="Nunito Sans"/>
+              </a:rPr>
+              <a:t>?</a:t>
             </a:r>
           </a:p>
           <a:p>
@@ -4304,7 +4357,7 @@
                 </a:solidFill>
                 <a:latin typeface="Nunito Sans"/>
               </a:rPr>
-              <a:t>Lo que ella haga con ellos es otra cosa: puede hablarlo con calma, o vigilar y prohibir.</a:t>
+              <a:t>¿Que a las chicas «no se les da»? Eso sería un estereotipo, sin pruebas.</a:t>
             </a:r>
           </a:p>
           <a:p>
@@ -4329,25 +4382,7 @@
                 </a:solidFill>
                 <a:latin typeface="Nunito Sans"/>
               </a:rPr>
-              <a:t>El mito es creer que los celos </a:t>
-            </a:r>
-            <a:r>
-              <a:rPr sz="2400" b="1">
-                <a:solidFill>
-                  <a:srgbClr val="1F2A44"/>
-                </a:solidFill>
-                <a:latin typeface="Nunito Sans"/>
-              </a:rPr>
-              <a:t>prueban</a:t>
-            </a:r>
-            <a:r>
-              <a:rPr sz="2400" b="0">
-                <a:solidFill>
-                  <a:srgbClr val="1F2A44"/>
-                </a:solidFill>
-                <a:latin typeface="Nunito Sans"/>
-              </a:rPr>
-              <a:t> amor y dan derecho a controlar.</a:t>
+              <a:t>Otras causas posibles: pocas informáticas conocidas, comentarios en casa, miedo a ser «la única».</a:t>
             </a:r>
           </a:p>
           <a:p>
@@ -4372,7 +4407,7 @@
                 </a:solidFill>
                 <a:latin typeface="Nunito Sans"/>
               </a:rPr>
-              <a:t>Conclusión: la emoción no se elige; lo que hago con ella, sí.</a:t>
+              <a:t>Conclusión: ante una diferencia, no saltes a la primera explicación. Pregunta por qué y busca pruebas.</a:t>
             </a:r>
           </a:p>
         </p:txBody>
@@ -4386,6 +4421,340 @@
 </file>
 
 <file path=ppt/slides/slide13.xml><?xml version="1.0" encoding="utf-8"?>
+<p:sld xmlns:a="http://schemas.openxmlformats.org/drawingml/2006/main" xmlns:p="http://schemas.openxmlformats.org/presentationml/2006/main" xmlns:r="http://schemas.openxmlformats.org/officeDocument/2006/relationships">
+  <p:cSld>
+    <p:bg>
+      <p:bgPr>
+        <a:solidFill>
+          <a:srgbClr val="F6C9A8"/>
+        </a:solidFill>
+        <a:effectLst/>
+      </p:bgPr>
+    </p:bg>
+    <p:spTree>
+      <p:nvGrpSpPr>
+        <p:cNvPr id="1" name=""/>
+        <p:cNvGrpSpPr/>
+        <p:nvPr/>
+      </p:nvGrpSpPr>
+      <p:grpSpPr/>
+      <p:sp>
+        <p:nvSpPr>
+          <p:cNvPr id="2" name="TextBox 1"/>
+          <p:cNvSpPr txBox="1"/>
+          <p:nvPr/>
+        </p:nvSpPr>
+        <p:spPr>
+          <a:xfrm>
+            <a:off x="640000" y="380000"/>
+            <a:ext cx="10912000" cy="420000"/>
+          </a:xfrm>
+          <a:prstGeom prst="rect">
+            <a:avLst/>
+          </a:prstGeom>
+          <a:noFill/>
+        </p:spPr>
+        <p:txBody>
+          <a:bodyPr wrap="square">
+            <a:spAutoFit/>
+          </a:bodyPr>
+          <a:lstStyle/>
+          <a:p>
+            <a:pPr>
+              <a:spcAft>
+                <a:spcPts val="630"/>
+              </a:spcAft>
+            </a:pPr>
+            <a:r>
+              <a:rPr sz="1400" b="1">
+                <a:solidFill>
+                  <a:srgbClr val="1F2A44"/>
+                </a:solidFill>
+                <a:latin typeface="Nunito Sans"/>
+              </a:rPr>
+              <a:t>CASO TRAMPA · BLOQUE 2 · LEER BIEN LOS DATOS</a:t>
+            </a:r>
+          </a:p>
+        </p:txBody>
+      </p:sp>
+      <p:sp>
+        <p:nvSpPr>
+          <p:cNvPr id="3" name="TextBox 2"/>
+          <p:cNvSpPr txBox="1"/>
+          <p:nvPr/>
+        </p:nvSpPr>
+        <p:spPr>
+          <a:xfrm>
+            <a:off x="640000" y="760000"/>
+            <a:ext cx="10912000" cy="800000"/>
+          </a:xfrm>
+          <a:prstGeom prst="rect">
+            <a:avLst/>
+          </a:prstGeom>
+          <a:noFill/>
+        </p:spPr>
+        <p:txBody>
+          <a:bodyPr wrap="square">
+            <a:spAutoFit/>
+          </a:bodyPr>
+          <a:lstStyle/>
+          <a:p>
+            <a:pPr>
+              <a:spcAft>
+                <a:spcPts val="1710"/>
+              </a:spcAft>
+            </a:pPr>
+            <a:r>
+              <a:rPr sz="3800" b="1">
+                <a:solidFill>
+                  <a:srgbClr val="1F2A44"/>
+                </a:solidFill>
+                <a:latin typeface="Fredoka"/>
+              </a:rPr>
+              <a:t>⚠ Ya está explicado</a:t>
+            </a:r>
+          </a:p>
+        </p:txBody>
+      </p:sp>
+      <p:sp>
+        <p:nvSpPr>
+          <p:cNvPr id="4" name="Rectangle 3"/>
+          <p:cNvSpPr/>
+          <p:nvPr/>
+        </p:nvSpPr>
+        <p:spPr>
+          <a:xfrm>
+            <a:off x="640000" y="1600000"/>
+            <a:ext cx="10912000" cy="1100000"/>
+          </a:xfrm>
+          <a:prstGeom prst="rect">
+            <a:avLst/>
+          </a:prstGeom>
+          <a:solidFill>
+            <a:srgbClr val="FBF7EF"/>
+          </a:solidFill>
+          <a:ln>
+            <a:noFill/>
+          </a:ln>
+        </p:spPr>
+        <p:style>
+          <a:lnRef idx="1">
+            <a:schemeClr val="accent1"/>
+          </a:lnRef>
+          <a:fillRef idx="3">
+            <a:schemeClr val="accent1"/>
+          </a:fillRef>
+          <a:effectRef idx="2">
+            <a:schemeClr val="accent1"/>
+          </a:effectRef>
+          <a:fontRef idx="minor">
+            <a:schemeClr val="lt1"/>
+          </a:fontRef>
+        </p:style>
+        <p:txBody>
+          <a:bodyPr rtlCol="0" anchor="ctr"/>
+          <a:lstStyle/>
+          <a:p>
+            <a:pPr algn="ctr"/>
+          </a:p>
+        </p:txBody>
+      </p:sp>
+      <p:sp>
+        <p:nvSpPr>
+          <p:cNvPr id="5" name="TextBox 4"/>
+          <p:cNvSpPr txBox="1"/>
+          <p:nvPr/>
+        </p:nvSpPr>
+        <p:spPr>
+          <a:xfrm>
+            <a:off x="840000" y="1650000"/>
+            <a:ext cx="10512000" cy="1000000"/>
+          </a:xfrm>
+          <a:prstGeom prst="rect">
+            <a:avLst/>
+          </a:prstGeom>
+          <a:noFill/>
+        </p:spPr>
+        <p:txBody>
+          <a:bodyPr wrap="square" anchor="ctr">
+            <a:spAutoFit/>
+          </a:bodyPr>
+          <a:lstStyle/>
+          <a:p>
+            <a:pPr>
+              <a:spcAft>
+                <a:spcPts val="1170"/>
+              </a:spcAft>
+            </a:pPr>
+            <a:r>
+              <a:rPr sz="2600" b="1">
+                <a:solidFill>
+                  <a:srgbClr val="1F2A44"/>
+                </a:solidFill>
+                <a:latin typeface="Nunito Sans"/>
+              </a:rPr>
+              <a:t>Un chico: «La diferencia de sueldo es porque muchas mujeres trabajan a jornada parcial. Así que no hay ninguna desigualdad».</a:t>
+            </a:r>
+          </a:p>
+        </p:txBody>
+      </p:sp>
+      <p:sp>
+        <p:nvSpPr>
+          <p:cNvPr id="6" name="TextBox 5"/>
+          <p:cNvSpPr txBox="1"/>
+          <p:nvPr/>
+        </p:nvSpPr>
+        <p:spPr>
+          <a:xfrm>
+            <a:off x="640000" y="2900000"/>
+            <a:ext cx="10912000" cy="3500000"/>
+          </a:xfrm>
+          <a:prstGeom prst="rect">
+            <a:avLst/>
+          </a:prstGeom>
+          <a:noFill/>
+        </p:spPr>
+        <p:txBody>
+          <a:bodyPr wrap="square">
+            <a:spAutoFit/>
+          </a:bodyPr>
+          <a:lstStyle/>
+          <a:p>
+            <a:pPr>
+              <a:spcAft>
+                <a:spcPts val="1080"/>
+              </a:spcAft>
+            </a:pPr>
+            <a:r>
+              <a:rPr sz="2400" b="1">
+                <a:solidFill>
+                  <a:srgbClr val="E8793A"/>
+                </a:solidFill>
+                <a:latin typeface="Nunito Sans"/>
+              </a:rPr>
+              <a:t>1. </a:t>
+            </a:r>
+            <a:r>
+              <a:rPr sz="2400" b="0">
+                <a:solidFill>
+                  <a:srgbClr val="1F2A44"/>
+                </a:solidFill>
+                <a:latin typeface="Nunito Sans"/>
+              </a:rPr>
+              <a:t>¿Queda todo explicado?</a:t>
+            </a:r>
+          </a:p>
+          <a:p>
+            <a:pPr>
+              <a:spcAft>
+                <a:spcPts val="1080"/>
+              </a:spcAft>
+            </a:pPr>
+            <a:r>
+              <a:rPr sz="2400" b="1">
+                <a:solidFill>
+                  <a:srgbClr val="E8793A"/>
+                </a:solidFill>
+                <a:latin typeface="Nunito Sans"/>
+              </a:rPr>
+              <a:t>2. </a:t>
+            </a:r>
+            <a:r>
+              <a:rPr sz="2400" b="0">
+                <a:solidFill>
+                  <a:srgbClr val="1F2A44"/>
+                </a:solidFill>
+                <a:latin typeface="Nunito Sans"/>
+              </a:rPr>
+              <a:t>Parece que sí: ha encontrado una causa real.</a:t>
+            </a:r>
+          </a:p>
+          <a:p>
+            <a:pPr>
+              <a:spcAft>
+                <a:spcPts val="1080"/>
+              </a:spcAft>
+            </a:pPr>
+            <a:r>
+              <a:rPr sz="2400" b="1">
+                <a:solidFill>
+                  <a:srgbClr val="E8793A"/>
+                </a:solidFill>
+                <a:latin typeface="Nunito Sans"/>
+              </a:rPr>
+              <a:t>3. </a:t>
+            </a:r>
+            <a:r>
+              <a:rPr sz="2400" b="0">
+                <a:solidFill>
+                  <a:srgbClr val="1F2A44"/>
+                </a:solidFill>
+                <a:latin typeface="Nunito Sans"/>
+              </a:rPr>
+              <a:t>Pero falta otra pregunta: ¿por qué hay muchas más mujeres que hombres a jornada parcial?</a:t>
+            </a:r>
+          </a:p>
+          <a:p>
+            <a:pPr>
+              <a:spcAft>
+                <a:spcPts val="1080"/>
+              </a:spcAft>
+            </a:pPr>
+            <a:r>
+              <a:rPr sz="2400" b="1">
+                <a:solidFill>
+                  <a:srgbClr val="E8793A"/>
+                </a:solidFill>
+                <a:latin typeface="Nunito Sans"/>
+              </a:rPr>
+              <a:t>4. </a:t>
+            </a:r>
+            <a:r>
+              <a:rPr sz="2400" b="0">
+                <a:solidFill>
+                  <a:srgbClr val="1F2A44"/>
+                </a:solidFill>
+                <a:latin typeface="Nunito Sans"/>
+              </a:rPr>
+              <a:t>Muchas la eligen, o la aceptan, para cuidar a hijos o a mayores: el reparto de los cuidados es desigual.</a:t>
+            </a:r>
+          </a:p>
+          <a:p>
+            <a:pPr>
+              <a:spcAft>
+                <a:spcPts val="1080"/>
+              </a:spcAft>
+            </a:pPr>
+            <a:r>
+              <a:rPr sz="2400" b="1">
+                <a:solidFill>
+                  <a:srgbClr val="E8793A"/>
+                </a:solidFill>
+                <a:latin typeface="Nunito Sans"/>
+              </a:rPr>
+              <a:t>5. </a:t>
+            </a:r>
+            <a:r>
+              <a:rPr sz="2400" b="0">
+                <a:solidFill>
+                  <a:srgbClr val="1F2A44"/>
+                </a:solidFill>
+                <a:latin typeface="Nunito Sans"/>
+              </a:rPr>
+              <a:t>Conclusión: encontrar una causa no cierra el tema. A veces esa causa es otra desigualdad.</a:t>
+            </a:r>
+          </a:p>
+        </p:txBody>
+      </p:sp>
+    </p:spTree>
+  </p:cSld>
+  <p:clrMapOvr>
+    <a:masterClrMapping/>
+  </p:clrMapOvr>
+</p:sld>
+</file>
+
+<file path=ppt/slides/slide14.xml><?xml version="1.0" encoding="utf-8"?>
 <p:sld xmlns:a="http://schemas.openxmlformats.org/drawingml/2006/main" xmlns:p="http://schemas.openxmlformats.org/presentationml/2006/main" xmlns:r="http://schemas.openxmlformats.org/officeDocument/2006/relationships">
   <p:cSld>
     <p:bg>
@@ -4437,7 +4806,7 @@
                 </a:solidFill>
                 <a:latin typeface="Nunito Sans"/>
               </a:rPr>
-              <a:t>BLOQUE 2 · CASOS RESUELTOS</a:t>
+              <a:t>LO DE HOY EN TRES LÍNEAS</a:t>
             </a:r>
           </a:p>
         </p:txBody>
@@ -4476,103 +4845,21 @@
                 </a:solidFill>
                 <a:latin typeface="Fredoka"/>
               </a:rPr>
-              <a:t>¿Control o relación sana?</a:t>
-            </a:r>
-          </a:p>
-        </p:txBody>
-      </p:sp>
-      <p:sp>
-        <p:nvSpPr>
-          <p:cNvPr id="4" name="Rectangle 3"/>
-          <p:cNvSpPr/>
-          <p:nvPr/>
-        </p:nvSpPr>
-        <p:spPr>
-          <a:xfrm>
-            <a:off x="640000" y="1650000"/>
-            <a:ext cx="5306000" cy="4400000"/>
-          </a:xfrm>
-          <a:prstGeom prst="rect">
-            <a:avLst/>
-          </a:prstGeom>
-          <a:solidFill>
-            <a:srgbClr val="FBE3D2"/>
-          </a:solidFill>
-          <a:ln>
-            <a:noFill/>
-          </a:ln>
-        </p:spPr>
-        <p:style>
-          <a:lnRef idx="1">
-            <a:schemeClr val="accent1"/>
-          </a:lnRef>
-          <a:fillRef idx="3">
-            <a:schemeClr val="accent1"/>
-          </a:fillRef>
-          <a:effectRef idx="2">
-            <a:schemeClr val="accent1"/>
-          </a:effectRef>
-          <a:fontRef idx="minor">
-            <a:schemeClr val="lt1"/>
-          </a:fontRef>
-        </p:style>
-        <p:txBody>
-          <a:bodyPr rtlCol="0" anchor="ctr"/>
-          <a:lstStyle/>
-          <a:p>
-            <a:pPr algn="ctr"/>
-          </a:p>
-        </p:txBody>
-      </p:sp>
-      <p:sp>
-        <p:nvSpPr>
-          <p:cNvPr id="5" name="TextBox 4"/>
+              <a:t>Escríbelo tú primero, sin mirar</a:t>
+            </a:r>
+          </a:p>
+        </p:txBody>
+      </p:sp>
+      <p:sp>
+        <p:nvSpPr>
+          <p:cNvPr id="4" name="TextBox 3"/>
           <p:cNvSpPr txBox="1"/>
           <p:nvPr/>
         </p:nvSpPr>
         <p:spPr>
           <a:xfrm>
-            <a:off x="840000" y="1750000"/>
-            <a:ext cx="4906000" cy="600000"/>
-          </a:xfrm>
-          <a:prstGeom prst="rect">
-            <a:avLst/>
-          </a:prstGeom>
-          <a:noFill/>
-        </p:spPr>
-        <p:txBody>
-          <a:bodyPr wrap="square">
-            <a:spAutoFit/>
-          </a:bodyPr>
-          <a:lstStyle/>
-          <a:p>
-            <a:pPr>
-              <a:spcAft>
-                <a:spcPts val="1260"/>
-              </a:spcAft>
-            </a:pPr>
-            <a:r>
-              <a:rPr sz="2800" b="1">
-                <a:solidFill>
-                  <a:srgbClr val="C2531C"/>
-                </a:solidFill>
-                <a:latin typeface="Nunito Sans"/>
-              </a:rPr>
-              <a:t>Control</a:t>
-            </a:r>
-          </a:p>
-        </p:txBody>
-      </p:sp>
-      <p:sp>
-        <p:nvSpPr>
-          <p:cNvPr id="6" name="TextBox 5"/>
-          <p:cNvSpPr txBox="1"/>
-          <p:nvPr/>
-        </p:nvSpPr>
-        <p:spPr>
-          <a:xfrm>
-            <a:off x="840000" y="2400000"/>
-            <a:ext cx="4906000" cy="3500000"/>
+            <a:off x="640000" y="1800000"/>
+            <a:ext cx="10912000" cy="1500000"/>
           </a:xfrm>
           <a:prstGeom prst="rect">
             <a:avLst/>
@@ -4591,631 +4878,13 @@
               </a:spcAft>
             </a:pPr>
             <a:r>
-              <a:rPr sz="2600" b="1">
-                <a:solidFill>
-                  <a:srgbClr val="E8793A"/>
-                </a:solidFill>
-                <a:latin typeface="Nunito Sans"/>
-              </a:rPr>
-              <a:t>• </a:t>
-            </a:r>
-            <a:r>
               <a:rPr sz="2600" b="0">
                 <a:solidFill>
-                  <a:srgbClr val="1F2A44"/>
-                </a:solidFill>
-                <a:latin typeface="Nunito Sans"/>
-              </a:rPr>
-              <a:t>Los celos como prueba de amor</a:t>
-            </a:r>
-          </a:p>
-          <a:p>
-            <a:pPr>
-              <a:spcAft>
-                <a:spcPts val="1170"/>
-              </a:spcAft>
-            </a:pPr>
-            <a:r>
-              <a:rPr sz="2600" b="1">
-                <a:solidFill>
-                  <a:srgbClr val="E8793A"/>
-                </a:solidFill>
-                <a:latin typeface="Nunito Sans"/>
-              </a:rPr>
-              <a:t>• </a:t>
-            </a:r>
-            <a:r>
-              <a:rPr sz="2600" b="0">
-                <a:solidFill>
-                  <a:srgbClr val="1F2A44"/>
-                </a:solidFill>
-                <a:latin typeface="Nunito Sans"/>
-              </a:rPr>
-              <a:t>Revisar el móvil y pedir contraseñas</a:t>
-            </a:r>
-          </a:p>
-          <a:p>
-            <a:pPr>
-              <a:spcAft>
-                <a:spcPts val="1170"/>
-              </a:spcAft>
-            </a:pPr>
-            <a:r>
-              <a:rPr sz="2600" b="1">
-                <a:solidFill>
-                  <a:srgbClr val="E8793A"/>
-                </a:solidFill>
-                <a:latin typeface="Nunito Sans"/>
-              </a:rPr>
-              <a:t>• </a:t>
-            </a:r>
-            <a:r>
-              <a:rPr sz="2600" b="0">
-                <a:solidFill>
-                  <a:srgbClr val="1F2A44"/>
-                </a:solidFill>
-                <a:latin typeface="Nunito Sans"/>
-              </a:rPr>
-              <a:t>Separarte de tu cuadrilla</a:t>
-            </a:r>
-          </a:p>
-        </p:txBody>
-      </p:sp>
-      <p:sp>
-        <p:nvSpPr>
-          <p:cNvPr id="7" name="Rectangle 6"/>
-          <p:cNvSpPr/>
-          <p:nvPr/>
-        </p:nvSpPr>
-        <p:spPr>
-          <a:xfrm>
-            <a:off x="6246000" y="1650000"/>
-            <a:ext cx="5306000" cy="4400000"/>
-          </a:xfrm>
-          <a:prstGeom prst="rect">
-            <a:avLst/>
-          </a:prstGeom>
-          <a:solidFill>
-            <a:srgbClr val="EAF0F7"/>
-          </a:solidFill>
-          <a:ln>
-            <a:noFill/>
-          </a:ln>
-        </p:spPr>
-        <p:style>
-          <a:lnRef idx="1">
-            <a:schemeClr val="accent1"/>
-          </a:lnRef>
-          <a:fillRef idx="3">
-            <a:schemeClr val="accent1"/>
-          </a:fillRef>
-          <a:effectRef idx="2">
-            <a:schemeClr val="accent1"/>
-          </a:effectRef>
-          <a:fontRef idx="minor">
-            <a:schemeClr val="lt1"/>
-          </a:fontRef>
-        </p:style>
-        <p:txBody>
-          <a:bodyPr rtlCol="0" anchor="ctr"/>
-          <a:lstStyle/>
-          <a:p>
-            <a:pPr algn="ctr"/>
-          </a:p>
-        </p:txBody>
-      </p:sp>
-      <p:sp>
-        <p:nvSpPr>
-          <p:cNvPr id="8" name="TextBox 7"/>
-          <p:cNvSpPr txBox="1"/>
-          <p:nvPr/>
-        </p:nvSpPr>
-        <p:spPr>
-          <a:xfrm>
-            <a:off x="6446000" y="1750000"/>
-            <a:ext cx="4906000" cy="600000"/>
-          </a:xfrm>
-          <a:prstGeom prst="rect">
-            <a:avLst/>
-          </a:prstGeom>
-          <a:noFill/>
-        </p:spPr>
-        <p:txBody>
-          <a:bodyPr wrap="square">
-            <a:spAutoFit/>
-          </a:bodyPr>
-          <a:lstStyle/>
-          <a:p>
-            <a:pPr>
-              <a:spcAft>
-                <a:spcPts val="1260"/>
-              </a:spcAft>
-            </a:pPr>
-            <a:r>
-              <a:rPr sz="2800" b="1">
-                <a:solidFill>
-                  <a:srgbClr val="2F6FB5"/>
-                </a:solidFill>
-                <a:latin typeface="Nunito Sans"/>
-              </a:rPr>
-              <a:t>Relación sana</a:t>
-            </a:r>
-          </a:p>
-        </p:txBody>
-      </p:sp>
-      <p:sp>
-        <p:nvSpPr>
-          <p:cNvPr id="9" name="TextBox 8"/>
-          <p:cNvSpPr txBox="1"/>
-          <p:nvPr/>
-        </p:nvSpPr>
-        <p:spPr>
-          <a:xfrm>
-            <a:off x="6446000" y="2400000"/>
-            <a:ext cx="4906000" cy="3500000"/>
-          </a:xfrm>
-          <a:prstGeom prst="rect">
-            <a:avLst/>
-          </a:prstGeom>
-          <a:noFill/>
-        </p:spPr>
-        <p:txBody>
-          <a:bodyPr wrap="square">
-            <a:spAutoFit/>
-          </a:bodyPr>
-          <a:lstStyle/>
-          <a:p>
-            <a:pPr>
-              <a:spcAft>
-                <a:spcPts val="1170"/>
-              </a:spcAft>
-            </a:pPr>
-            <a:r>
-              <a:rPr sz="2600" b="1">
-                <a:solidFill>
-                  <a:srgbClr val="E8793A"/>
-                </a:solidFill>
-                <a:latin typeface="Nunito Sans"/>
-              </a:rPr>
-              <a:t>• </a:t>
-            </a:r>
-            <a:r>
-              <a:rPr sz="2600" b="1">
-                <a:solidFill>
-                  <a:srgbClr val="1F2A44"/>
-                </a:solidFill>
-                <a:latin typeface="Nunito Sans"/>
-              </a:rPr>
-              <a:t>Respeto:</a:t>
-            </a:r>
-            <a:r>
-              <a:rPr sz="2600" b="0">
-                <a:solidFill>
-                  <a:srgbClr val="1F2A44"/>
-                </a:solidFill>
-                <a:latin typeface="Nunito Sans"/>
-              </a:rPr>
-              <a:t> tus decisiones y tus límites cuentan</a:t>
-            </a:r>
-          </a:p>
-          <a:p>
-            <a:pPr>
-              <a:spcAft>
-                <a:spcPts val="1170"/>
-              </a:spcAft>
-            </a:pPr>
-            <a:r>
-              <a:rPr sz="2600" b="1">
-                <a:solidFill>
-                  <a:srgbClr val="E8793A"/>
-                </a:solidFill>
-                <a:latin typeface="Nunito Sans"/>
-              </a:rPr>
-              <a:t>• </a:t>
-            </a:r>
-            <a:r>
-              <a:rPr sz="2600" b="1">
-                <a:solidFill>
-                  <a:srgbClr val="1F2A44"/>
-                </a:solidFill>
-                <a:latin typeface="Nunito Sans"/>
-              </a:rPr>
-              <a:t>Confianza:</a:t>
-            </a:r>
-            <a:r>
-              <a:rPr sz="2600" b="0">
-                <a:solidFill>
-                  <a:srgbClr val="1F2A44"/>
-                </a:solidFill>
-                <a:latin typeface="Nunito Sans"/>
-              </a:rPr>
-              <a:t> no hace falta vigilar</a:t>
-            </a:r>
-          </a:p>
-          <a:p>
-            <a:pPr>
-              <a:spcAft>
-                <a:spcPts val="1170"/>
-              </a:spcAft>
-            </a:pPr>
-            <a:r>
-              <a:rPr sz="2600" b="1">
-                <a:solidFill>
-                  <a:srgbClr val="E8793A"/>
-                </a:solidFill>
-                <a:latin typeface="Nunito Sans"/>
-              </a:rPr>
-              <a:t>• </a:t>
-            </a:r>
-            <a:r>
-              <a:rPr sz="2600" b="1">
-                <a:solidFill>
-                  <a:srgbClr val="1F2A44"/>
-                </a:solidFill>
-                <a:latin typeface="Nunito Sans"/>
-              </a:rPr>
-              <a:t>Libertad:</a:t>
-            </a:r>
-            <a:r>
-              <a:rPr sz="2600" b="0">
-                <a:solidFill>
-                  <a:srgbClr val="1F2A44"/>
-                </a:solidFill>
-                <a:latin typeface="Nunito Sans"/>
-              </a:rPr>
-              <a:t> tienes tu vida, tus amigos y tus aficiones</a:t>
-            </a:r>
-          </a:p>
-        </p:txBody>
-      </p:sp>
-    </p:spTree>
-  </p:cSld>
-  <p:clrMapOvr>
-    <a:masterClrMapping/>
-  </p:clrMapOvr>
-</p:sld>
-</file>
-
-<file path=ppt/slides/slide14.xml><?xml version="1.0" encoding="utf-8"?>
-<p:sld xmlns:a="http://schemas.openxmlformats.org/drawingml/2006/main" xmlns:p="http://schemas.openxmlformats.org/presentationml/2006/main" xmlns:r="http://schemas.openxmlformats.org/officeDocument/2006/relationships">
-  <p:cSld>
-    <p:bg>
-      <p:bgPr>
-        <a:solidFill>
-          <a:srgbClr val="F6C9A8"/>
-        </a:solidFill>
-        <a:effectLst/>
-      </p:bgPr>
-    </p:bg>
-    <p:spTree>
-      <p:nvGrpSpPr>
-        <p:cNvPr id="1" name=""/>
-        <p:cNvGrpSpPr/>
-        <p:nvPr/>
-      </p:nvGrpSpPr>
-      <p:grpSpPr/>
-      <p:sp>
-        <p:nvSpPr>
-          <p:cNvPr id="2" name="TextBox 1"/>
-          <p:cNvSpPr txBox="1"/>
-          <p:nvPr/>
-        </p:nvSpPr>
-        <p:spPr>
-          <a:xfrm>
-            <a:off x="640000" y="380000"/>
-            <a:ext cx="10912000" cy="420000"/>
-          </a:xfrm>
-          <a:prstGeom prst="rect">
-            <a:avLst/>
-          </a:prstGeom>
-          <a:noFill/>
-        </p:spPr>
-        <p:txBody>
-          <a:bodyPr wrap="square">
-            <a:spAutoFit/>
-          </a:bodyPr>
-          <a:lstStyle/>
-          <a:p>
-            <a:pPr>
-              <a:spcAft>
-                <a:spcPts val="630"/>
-              </a:spcAft>
-            </a:pPr>
-            <a:r>
-              <a:rPr sz="1400" b="1">
-                <a:solidFill>
-                  <a:srgbClr val="1F2A44"/>
-                </a:solidFill>
-                <a:latin typeface="Nunito Sans"/>
-              </a:rPr>
-              <a:t>CASO TRAMPA · BLOQUE 2 · CASOS RESUELTOS</a:t>
-            </a:r>
-          </a:p>
-        </p:txBody>
-      </p:sp>
-      <p:sp>
-        <p:nvSpPr>
-          <p:cNvPr id="3" name="TextBox 2"/>
-          <p:cNvSpPr txBox="1"/>
-          <p:nvPr/>
-        </p:nvSpPr>
-        <p:spPr>
-          <a:xfrm>
-            <a:off x="640000" y="760000"/>
-            <a:ext cx="10912000" cy="800000"/>
-          </a:xfrm>
-          <a:prstGeom prst="rect">
-            <a:avLst/>
-          </a:prstGeom>
-          <a:noFill/>
-        </p:spPr>
-        <p:txBody>
-          <a:bodyPr wrap="square">
-            <a:spAutoFit/>
-          </a:bodyPr>
-          <a:lstStyle/>
-          <a:p>
-            <a:pPr>
-              <a:spcAft>
-                <a:spcPts val="1710"/>
-              </a:spcAft>
-            </a:pPr>
-            <a:r>
-              <a:rPr sz="3800" b="1">
-                <a:solidFill>
-                  <a:srgbClr val="1F2A44"/>
-                </a:solidFill>
-                <a:latin typeface="Fredoka"/>
-              </a:rPr>
-              <a:t>⚠ No se enseñan los móviles</a:t>
-            </a:r>
-          </a:p>
-        </p:txBody>
-      </p:sp>
-      <p:sp>
-        <p:nvSpPr>
-          <p:cNvPr id="4" name="Rectangle 3"/>
-          <p:cNvSpPr/>
-          <p:nvPr/>
-        </p:nvSpPr>
-        <p:spPr>
-          <a:xfrm>
-            <a:off x="640000" y="1600000"/>
-            <a:ext cx="10912000" cy="1100000"/>
-          </a:xfrm>
-          <a:prstGeom prst="rect">
-            <a:avLst/>
-          </a:prstGeom>
-          <a:solidFill>
-            <a:srgbClr val="FBF7EF"/>
-          </a:solidFill>
-          <a:ln>
-            <a:noFill/>
-          </a:ln>
-        </p:spPr>
-        <p:style>
-          <a:lnRef idx="1">
-            <a:schemeClr val="accent1"/>
-          </a:lnRef>
-          <a:fillRef idx="3">
-            <a:schemeClr val="accent1"/>
-          </a:fillRef>
-          <a:effectRef idx="2">
-            <a:schemeClr val="accent1"/>
-          </a:effectRef>
-          <a:fontRef idx="minor">
-            <a:schemeClr val="lt1"/>
-          </a:fontRef>
-        </p:style>
-        <p:txBody>
-          <a:bodyPr rtlCol="0" anchor="ctr"/>
-          <a:lstStyle/>
-          <a:p>
-            <a:pPr algn="ctr"/>
-          </a:p>
-        </p:txBody>
-      </p:sp>
-      <p:sp>
-        <p:nvSpPr>
-          <p:cNvPr id="5" name="TextBox 4"/>
-          <p:cNvSpPr txBox="1"/>
-          <p:nvPr/>
-        </p:nvSpPr>
-        <p:spPr>
-          <a:xfrm>
-            <a:off x="840000" y="1650000"/>
-            <a:ext cx="10512000" cy="1000000"/>
-          </a:xfrm>
-          <a:prstGeom prst="rect">
-            <a:avLst/>
-          </a:prstGeom>
-          <a:noFill/>
-        </p:spPr>
-        <p:txBody>
-          <a:bodyPr wrap="square" anchor="ctr">
-            <a:spAutoFit/>
-          </a:bodyPr>
-          <a:lstStyle/>
-          <a:p>
-            <a:pPr>
-              <a:spcAft>
-                <a:spcPts val="1170"/>
-              </a:spcAft>
-            </a:pPr>
-            <a:r>
-              <a:rPr sz="2600" b="1">
-                <a:solidFill>
-                  <a:srgbClr val="1F2A44"/>
-                </a:solidFill>
-                <a:latin typeface="Nunito Sans"/>
-              </a:rPr>
-              <a:t>Una chica y un chico llevan un año juntos. No se revisan el móvil ni se piden contraseñas. Una amiga opina: «Eso es que no confían el uno en el otro».</a:t>
-            </a:r>
-          </a:p>
-        </p:txBody>
-      </p:sp>
-      <p:sp>
-        <p:nvSpPr>
-          <p:cNvPr id="6" name="TextBox 5"/>
-          <p:cNvSpPr txBox="1"/>
-          <p:nvPr/>
-        </p:nvSpPr>
-        <p:spPr>
-          <a:xfrm>
-            <a:off x="640000" y="2900000"/>
-            <a:ext cx="10912000" cy="3500000"/>
-          </a:xfrm>
-          <a:prstGeom prst="rect">
-            <a:avLst/>
-          </a:prstGeom>
-          <a:noFill/>
-        </p:spPr>
-        <p:txBody>
-          <a:bodyPr wrap="square">
-            <a:spAutoFit/>
-          </a:bodyPr>
-          <a:lstStyle/>
-          <a:p>
-            <a:pPr>
-              <a:spcAft>
-                <a:spcPts val="1080"/>
-              </a:spcAft>
-            </a:pPr>
-            <a:r>
-              <a:rPr sz="2400" b="1">
-                <a:solidFill>
-                  <a:srgbClr val="E8793A"/>
-                </a:solidFill>
-                <a:latin typeface="Nunito Sans"/>
-              </a:rPr>
-              <a:t>1. </a:t>
-            </a:r>
-            <a:r>
-              <a:rPr sz="2400" b="0">
-                <a:solidFill>
-                  <a:srgbClr val="1F2A44"/>
-                </a:solidFill>
-                <a:latin typeface="Nunito Sans"/>
-              </a:rPr>
-              <a:t>¿Tiene razón esa amiga?</a:t>
-            </a:r>
-          </a:p>
-          <a:p>
-            <a:pPr>
-              <a:spcAft>
-                <a:spcPts val="1080"/>
-              </a:spcAft>
-            </a:pPr>
-            <a:r>
-              <a:rPr sz="2400" b="1">
-                <a:solidFill>
-                  <a:srgbClr val="E8793A"/>
-                </a:solidFill>
-                <a:latin typeface="Nunito Sans"/>
-              </a:rPr>
-              <a:t>2. </a:t>
-            </a:r>
-            <a:r>
-              <a:rPr sz="2400" b="0">
-                <a:solidFill>
-                  <a:srgbClr val="1F2A44"/>
-                </a:solidFill>
-                <a:latin typeface="Nunito Sans"/>
-              </a:rPr>
-              <a:t>Parece lógico: si no hay secretos, ¿por qué no enseñarlo?</a:t>
-            </a:r>
-          </a:p>
-          <a:p>
-            <a:pPr>
-              <a:spcAft>
-                <a:spcPts val="1080"/>
-              </a:spcAft>
-            </a:pPr>
-            <a:r>
-              <a:rPr sz="2400" b="1">
-                <a:solidFill>
-                  <a:srgbClr val="E8793A"/>
-                </a:solidFill>
-                <a:latin typeface="Nunito Sans"/>
-              </a:rPr>
-              <a:t>3. </a:t>
-            </a:r>
-            <a:r>
-              <a:rPr sz="2400" b="0">
-                <a:solidFill>
-                  <a:srgbClr val="1F2A44"/>
-                </a:solidFill>
-                <a:latin typeface="Nunito Sans"/>
-              </a:rPr>
-              <a:t>Pero no pedir el móvil es justo lo contrario: </a:t>
-            </a:r>
-            <a:r>
-              <a:rPr sz="2400" b="1">
-                <a:solidFill>
-                  <a:srgbClr val="1F2A44"/>
-                </a:solidFill>
-                <a:latin typeface="Nunito Sans"/>
-              </a:rPr>
-              <a:t>confianza</a:t>
-            </a:r>
-            <a:r>
-              <a:rPr sz="2400" b="0">
-                <a:solidFill>
-                  <a:srgbClr val="1F2A44"/>
-                </a:solidFill>
-                <a:latin typeface="Nunito Sans"/>
-              </a:rPr>
-              <a:t>. Si confías, no necesitas comprobar.</a:t>
-            </a:r>
-          </a:p>
-          <a:p>
-            <a:pPr>
-              <a:spcAft>
-                <a:spcPts val="1080"/>
-              </a:spcAft>
-            </a:pPr>
-            <a:r>
-              <a:rPr sz="2400" b="1">
-                <a:solidFill>
-                  <a:srgbClr val="E8793A"/>
-                </a:solidFill>
-                <a:latin typeface="Nunito Sans"/>
-              </a:rPr>
-              <a:t>4. </a:t>
-            </a:r>
-            <a:r>
-              <a:rPr sz="2400" b="0">
-                <a:solidFill>
-                  <a:srgbClr val="1F2A44"/>
-                </a:solidFill>
-                <a:latin typeface="Nunito Sans"/>
-              </a:rPr>
-              <a:t>¿Cómo lo sabe? Saca su conclusión de un dato que apunta a lo contrario. Y la intimidad es un derecho.</a:t>
-            </a:r>
-          </a:p>
-          <a:p>
-            <a:pPr>
-              <a:spcAft>
-                <a:spcPts val="1080"/>
-              </a:spcAft>
-            </a:pPr>
-            <a:r>
-              <a:rPr sz="2400" b="1">
-                <a:solidFill>
-                  <a:srgbClr val="E8793A"/>
-                </a:solidFill>
-                <a:latin typeface="Nunito Sans"/>
-              </a:rPr>
-              <a:t>5. </a:t>
-            </a:r>
-            <a:r>
-              <a:rPr sz="2400" b="0">
-                <a:solidFill>
-                  <a:srgbClr val="1F2A44"/>
-                </a:solidFill>
-                <a:latin typeface="Nunito Sans"/>
-              </a:rPr>
-              <a:t>Conclusión: respetar el móvil del otro no es desconfianza; suele ser señal de una relación sana.</a:t>
+                  <a:srgbClr val="4A5568"/>
+                </a:solidFill>
+                <a:latin typeface="Nunito Sans"/>
+              </a:rPr>
+              <a:t>Dos minutos. Después lo comparamos.</a:t>
             </a:r>
           </a:p>
         </p:txBody>
@@ -5293,8 +4962,8 @@
         </p:nvSpPr>
         <p:spPr>
           <a:xfrm>
-            <a:off x="640000" y="760000"/>
-            <a:ext cx="10912000" cy="800000"/>
+            <a:off x="640000" y="1300000"/>
+            <a:ext cx="10912000" cy="4800000"/>
           </a:xfrm>
           <a:prstGeom prst="rect">
             <a:avLst/>
@@ -5309,56 +4978,76 @@
           <a:p>
             <a:pPr>
               <a:spcAft>
-                <a:spcPts val="1710"/>
+                <a:spcPts val="1350"/>
               </a:spcAft>
             </a:pPr>
             <a:r>
-              <a:rPr sz="3800" b="1">
+              <a:rPr sz="3000" b="1">
+                <a:solidFill>
+                  <a:srgbClr val="E8793A"/>
+                </a:solidFill>
+                <a:latin typeface="Nunito Sans"/>
+              </a:rPr>
+              <a:t>1. </a:t>
+            </a:r>
+            <a:r>
+              <a:rPr sz="3000" b="0">
                 <a:solidFill>
                   <a:srgbClr val="1F2A44"/>
                 </a:solidFill>
-                <a:latin typeface="Fredoka"/>
-              </a:rPr>
-              <a:t>Escríbelo tú primero, sin mirar</a:t>
-            </a:r>
-          </a:p>
-        </p:txBody>
-      </p:sp>
-      <p:sp>
-        <p:nvSpPr>
-          <p:cNvPr id="4" name="TextBox 3"/>
-          <p:cNvSpPr txBox="1"/>
-          <p:nvPr/>
-        </p:nvSpPr>
-        <p:spPr>
-          <a:xfrm>
-            <a:off x="640000" y="1800000"/>
-            <a:ext cx="10912000" cy="1500000"/>
-          </a:xfrm>
-          <a:prstGeom prst="rect">
-            <a:avLst/>
-          </a:prstGeom>
-          <a:noFill/>
-        </p:spPr>
-        <p:txBody>
-          <a:bodyPr wrap="square">
-            <a:spAutoFit/>
-          </a:bodyPr>
-          <a:lstStyle/>
+                <a:latin typeface="Nunito Sans"/>
+              </a:rPr>
+              <a:t>Diferencia es ser distintos; desigualdad es tener menos derechos u oportunidades por ser de un grupo.</a:t>
+            </a:r>
+          </a:p>
           <a:p>
             <a:pPr>
               <a:spcAft>
-                <a:spcPts val="1170"/>
+                <a:spcPts val="1350"/>
               </a:spcAft>
             </a:pPr>
             <a:r>
-              <a:rPr sz="2600" b="0">
-                <a:solidFill>
-                  <a:srgbClr val="4A5568"/>
-                </a:solidFill>
-                <a:latin typeface="Nunito Sans"/>
-              </a:rPr>
-              <a:t>Dos minutos. Después lo comparamos.</a:t>
+              <a:rPr sz="3000" b="1">
+                <a:solidFill>
+                  <a:srgbClr val="E8793A"/>
+                </a:solidFill>
+                <a:latin typeface="Nunito Sans"/>
+              </a:rPr>
+              <a:t>2. </a:t>
+            </a:r>
+            <a:r>
+              <a:rPr sz="3000" b="0">
+                <a:solidFill>
+                  <a:srgbClr val="1F2A44"/>
+                </a:solidFill>
+                <a:latin typeface="Nunito Sans"/>
+              </a:rPr>
+              <a:t>Los datos del INE muestran desigualdades de género en el sueldo y en los cuidados.</a:t>
+            </a:r>
+          </a:p>
+          <a:p>
+            <a:pPr>
+              <a:spcAft>
+                <a:spcPts val="1350"/>
+              </a:spcAft>
+            </a:pPr>
+            <a:r>
+              <a:rPr sz="3000" b="1">
+                <a:solidFill>
+                  <a:srgbClr val="E8793A"/>
+                </a:solidFill>
+                <a:latin typeface="Nunito Sans"/>
+              </a:rPr>
+              <a:t>3. </a:t>
+            </a:r>
+            <a:r>
+              <a:rPr sz="3000" b="0">
+                <a:solidFill>
+                  <a:srgbClr val="1F2A44"/>
+                </a:solidFill>
+                <a:latin typeface="Nunito Sans"/>
+              </a:rPr>
+              <a:t>Una diferencia en los datos no se explica sola: hay que preguntar por qué.</a:t>
             </a:r>
           </a:p>
         </p:txBody>
@@ -5377,7 +5066,7 @@
     <p:bg>
       <p:bgPr>
         <a:solidFill>
-          <a:srgbClr val="FBF7EF"/>
+          <a:srgbClr val="1F2A44"/>
         </a:solidFill>
         <a:effectLst/>
       </p:bgPr>
@@ -5419,11 +5108,11 @@
             <a:r>
               <a:rPr sz="1400" b="1">
                 <a:solidFill>
-                  <a:srgbClr val="E8793A"/>
-                </a:solidFill>
-                <a:latin typeface="Nunito Sans"/>
-              </a:rPr>
-              <a:t>LO DE HOY EN TRES LÍNEAS</a:t>
+                  <a:srgbClr val="F4B183"/>
+                </a:solidFill>
+                <a:latin typeface="Nunito Sans"/>
+              </a:rPr>
+              <a:t>VÍDEO</a:t>
             </a:r>
           </a:p>
         </p:txBody>
@@ -5436,8 +5125,8 @@
         </p:nvSpPr>
         <p:spPr>
           <a:xfrm>
-            <a:off x="640000" y="1300000"/>
-            <a:ext cx="10912000" cy="4800000"/>
+            <a:off x="640000" y="760000"/>
+            <a:ext cx="10912000" cy="800000"/>
           </a:xfrm>
           <a:prstGeom prst="rect">
             <a:avLst/>
@@ -5452,76 +5141,56 @@
           <a:p>
             <a:pPr>
               <a:spcAft>
-                <a:spcPts val="1350"/>
+                <a:spcPts val="1620"/>
               </a:spcAft>
             </a:pPr>
             <a:r>
-              <a:rPr sz="3000" b="1">
-                <a:solidFill>
-                  <a:srgbClr val="E8793A"/>
-                </a:solidFill>
-                <a:latin typeface="Nunito Sans"/>
-              </a:rPr>
-              <a:t>1. </a:t>
-            </a:r>
-            <a:r>
-              <a:rPr sz="3000" b="0">
-                <a:solidFill>
-                  <a:srgbClr val="1F2A44"/>
-                </a:solidFill>
-                <a:latin typeface="Nunito Sans"/>
-              </a:rPr>
-              <a:t>Los mitos del amor romántico son creencias falsas o exageradas sobre el amor.</a:t>
-            </a:r>
-          </a:p>
+              <a:rPr sz="3600" b="1">
+                <a:solidFill>
+                  <a:srgbClr val="FBF7EF"/>
+                </a:solidFill>
+                <a:latin typeface="Fredoka"/>
+              </a:rPr>
+              <a:t>El origen del 8 de marzo y la brecha salarial explicada de forma sencilla</a:t>
+            </a:r>
+          </a:p>
+        </p:txBody>
+      </p:sp>
+      <p:sp>
+        <p:nvSpPr>
+          <p:cNvPr id="4" name="TextBox 3"/>
+          <p:cNvSpPr txBox="1"/>
+          <p:nvPr/>
+        </p:nvSpPr>
+        <p:spPr>
+          <a:xfrm>
+            <a:off x="640000" y="2200000"/>
+            <a:ext cx="10912000" cy="2000000"/>
+          </a:xfrm>
+          <a:prstGeom prst="rect">
+            <a:avLst/>
+          </a:prstGeom>
+          <a:noFill/>
+        </p:spPr>
+        <p:txBody>
+          <a:bodyPr wrap="square">
+            <a:spAutoFit/>
+          </a:bodyPr>
+          <a:lstStyle/>
           <a:p>
             <a:pPr>
               <a:spcAft>
-                <a:spcPts val="1350"/>
+                <a:spcPts val="1080"/>
               </a:spcAft>
             </a:pPr>
             <a:r>
-              <a:rPr sz="3000" b="1">
-                <a:solidFill>
-                  <a:srgbClr val="E8793A"/>
-                </a:solidFill>
-                <a:latin typeface="Nunito Sans"/>
-              </a:rPr>
-              <a:t>2. </a:t>
-            </a:r>
-            <a:r>
-              <a:rPr sz="3000" b="0">
-                <a:solidFill>
-                  <a:srgbClr val="1F2A44"/>
-                </a:solidFill>
-                <a:latin typeface="Nunito Sans"/>
-              </a:rPr>
-              <a:t>Los celos no prueban amor; vigilar y controlar no es cariño.</a:t>
-            </a:r>
-          </a:p>
-          <a:p>
-            <a:pPr>
-              <a:spcAft>
-                <a:spcPts val="1350"/>
-              </a:spcAft>
-            </a:pPr>
-            <a:r>
-              <a:rPr sz="3000" b="1">
-                <a:solidFill>
-                  <a:srgbClr val="E8793A"/>
-                </a:solidFill>
-                <a:latin typeface="Nunito Sans"/>
-              </a:rPr>
-              <a:t>3. </a:t>
-            </a:r>
-            <a:r>
-              <a:rPr sz="3000" b="0">
-                <a:solidFill>
-                  <a:srgbClr val="1F2A44"/>
-                </a:solidFill>
-                <a:latin typeface="Nunito Sans"/>
-              </a:rPr>
-              <a:t>Una relación sana se basa en respeto, confianza y libertad.</a:t>
+              <a:rPr sz="2400" b="0">
+                <a:solidFill>
+                  <a:srgbClr val="C9D3E6"/>
+                </a:solidFill>
+                <a:latin typeface="Nunito Sans"/>
+              </a:rPr>
+              <a:t>Ver de dónde viene el 8 de marzo y que la diferencia de sueldo tiene varias causas.</a:t>
             </a:r>
           </a:p>
         </p:txBody>
@@ -5586,149 +5255,6 @@
                 </a:solidFill>
                 <a:latin typeface="Nunito Sans"/>
               </a:rPr>
-              <a:t>VÍDEO</a:t>
-            </a:r>
-          </a:p>
-        </p:txBody>
-      </p:sp>
-      <p:sp>
-        <p:nvSpPr>
-          <p:cNvPr id="3" name="TextBox 2"/>
-          <p:cNvSpPr txBox="1"/>
-          <p:nvPr/>
-        </p:nvSpPr>
-        <p:spPr>
-          <a:xfrm>
-            <a:off x="640000" y="760000"/>
-            <a:ext cx="10912000" cy="800000"/>
-          </a:xfrm>
-          <a:prstGeom prst="rect">
-            <a:avLst/>
-          </a:prstGeom>
-          <a:noFill/>
-        </p:spPr>
-        <p:txBody>
-          <a:bodyPr wrap="square">
-            <a:spAutoFit/>
-          </a:bodyPr>
-          <a:lstStyle/>
-          <a:p>
-            <a:pPr>
-              <a:spcAft>
-                <a:spcPts val="1620"/>
-              </a:spcAft>
-            </a:pPr>
-            <a:r>
-              <a:rPr sz="3600" b="1">
-                <a:solidFill>
-                  <a:srgbClr val="FBF7EF"/>
-                </a:solidFill>
-                <a:latin typeface="Fredoka"/>
-              </a:rPr>
-              <a:t>Los mitos del amor romántico y el control en la pareja</a:t>
-            </a:r>
-          </a:p>
-        </p:txBody>
-      </p:sp>
-      <p:sp>
-        <p:nvSpPr>
-          <p:cNvPr id="4" name="TextBox 3"/>
-          <p:cNvSpPr txBox="1"/>
-          <p:nvPr/>
-        </p:nvSpPr>
-        <p:spPr>
-          <a:xfrm>
-            <a:off x="640000" y="2200000"/>
-            <a:ext cx="10912000" cy="2000000"/>
-          </a:xfrm>
-          <a:prstGeom prst="rect">
-            <a:avLst/>
-          </a:prstGeom>
-          <a:noFill/>
-        </p:spPr>
-        <p:txBody>
-          <a:bodyPr wrap="square">
-            <a:spAutoFit/>
-          </a:bodyPr>
-          <a:lstStyle/>
-          <a:p>
-            <a:pPr>
-              <a:spcAft>
-                <a:spcPts val="1080"/>
-              </a:spcAft>
-            </a:pPr>
-            <a:r>
-              <a:rPr sz="2400" b="0">
-                <a:solidFill>
-                  <a:srgbClr val="C9D3E6"/>
-                </a:solidFill>
-                <a:latin typeface="Nunito Sans"/>
-              </a:rPr>
-              <a:t>Ver más mitos en canciones y series, y separarlos de lo que es una relación sana.</a:t>
-            </a:r>
-          </a:p>
-        </p:txBody>
-      </p:sp>
-    </p:spTree>
-  </p:cSld>
-  <p:clrMapOvr>
-    <a:masterClrMapping/>
-  </p:clrMapOvr>
-</p:sld>
-</file>
-
-<file path=ppt/slides/slide18.xml><?xml version="1.0" encoding="utf-8"?>
-<p:sld xmlns:a="http://schemas.openxmlformats.org/drawingml/2006/main" xmlns:p="http://schemas.openxmlformats.org/presentationml/2006/main" xmlns:r="http://schemas.openxmlformats.org/officeDocument/2006/relationships">
-  <p:cSld>
-    <p:bg>
-      <p:bgPr>
-        <a:solidFill>
-          <a:srgbClr val="1F2A44"/>
-        </a:solidFill>
-        <a:effectLst/>
-      </p:bgPr>
-    </p:bg>
-    <p:spTree>
-      <p:nvGrpSpPr>
-        <p:cNvPr id="1" name=""/>
-        <p:cNvGrpSpPr/>
-        <p:nvPr/>
-      </p:nvGrpSpPr>
-      <p:grpSpPr/>
-      <p:sp>
-        <p:nvSpPr>
-          <p:cNvPr id="2" name="TextBox 1"/>
-          <p:cNvSpPr txBox="1"/>
-          <p:nvPr/>
-        </p:nvSpPr>
-        <p:spPr>
-          <a:xfrm>
-            <a:off x="640000" y="380000"/>
-            <a:ext cx="10912000" cy="420000"/>
-          </a:xfrm>
-          <a:prstGeom prst="rect">
-            <a:avLst/>
-          </a:prstGeom>
-          <a:noFill/>
-        </p:spPr>
-        <p:txBody>
-          <a:bodyPr wrap="square">
-            <a:spAutoFit/>
-          </a:bodyPr>
-          <a:lstStyle/>
-          <a:p>
-            <a:pPr>
-              <a:spcAft>
-                <a:spcPts val="630"/>
-              </a:spcAft>
-            </a:pPr>
-            <a:r>
-              <a:rPr sz="1400" b="1">
-                <a:solidFill>
-                  <a:srgbClr val="F4B183"/>
-                </a:solidFill>
-                <a:latin typeface="Nunito Sans"/>
-              </a:rPr>
               <a:t>AHORA, LA HOJA DEL DÍA</a:t>
             </a:r>
           </a:p>
@@ -6322,7 +5848,7 @@
                 </a:solidFill>
                 <a:latin typeface="Nunito Sans"/>
               </a:rPr>
-              <a:t>La amistad por ______ se basa en pasarlo bien juntos.  (sesión 78)</a:t>
+              <a:t>Un ______ de género es el papel que se espera que haga una persona por ser hombre o mujer.  (sesión 78)</a:t>
             </a:r>
           </a:p>
           <a:p>
@@ -6347,7 +5873,7 @@
                 </a:solidFill>
                 <a:latin typeface="Nunito Sans"/>
               </a:rPr>
-              <a:t>La presión del ______ es hacer algo para no quedarte fuera.  (sesión 78)</a:t>
+              <a:t>Los estereotipos nacen de ______ deprisa, como en la generalización apresurada.  (sesión 78)</a:t>
             </a:r>
           </a:p>
           <a:p>
@@ -6524,7 +6050,7 @@
                 </a:solidFill>
                 <a:latin typeface="Nunito Sans"/>
               </a:rPr>
-              <a:t>La amistad por </a:t>
+              <a:t>Un </a:t>
             </a:r>
             <a:r>
               <a:rPr sz="2600" b="1">
@@ -6533,7 +6059,7 @@
                 </a:solidFill>
                 <a:latin typeface="Nunito Sans"/>
               </a:rPr>
-              <a:t>placer</a:t>
+              <a:t>rol</a:t>
             </a:r>
             <a:r>
               <a:rPr sz="2600" b="0">
@@ -6542,7 +6068,7 @@
                 </a:solidFill>
                 <a:latin typeface="Nunito Sans"/>
               </a:rPr>
-              <a:t> se basa en pasarlo bien juntos.  (sesión 78)</a:t>
+              <a:t> de género es el papel que se espera que haga una persona por ser hombre o mujer.  (sesión 78)</a:t>
             </a:r>
           </a:p>
           <a:p>
@@ -6567,7 +6093,7 @@
                 </a:solidFill>
                 <a:latin typeface="Nunito Sans"/>
               </a:rPr>
-              <a:t>La presión del </a:t>
+              <a:t>Los estereotipos nacen de </a:t>
             </a:r>
             <a:r>
               <a:rPr sz="2600" b="1">
@@ -6576,7 +6102,7 @@
                 </a:solidFill>
                 <a:latin typeface="Nunito Sans"/>
               </a:rPr>
-              <a:t>grupo</a:t>
+              <a:t>generalizar</a:t>
             </a:r>
             <a:r>
               <a:rPr sz="2600" b="0">
@@ -6585,7 +6111,7 @@
                 </a:solidFill>
                 <a:latin typeface="Nunito Sans"/>
               </a:rPr>
-              <a:t> es hacer algo para no quedarte fuera.  (sesión 78)</a:t>
+              <a:t> deprisa, como en la generalización apresurada.  (sesión 78)</a:t>
             </a:r>
           </a:p>
           <a:p>
@@ -6775,7 +6301,7 @@
                 </a:solidFill>
                 <a:latin typeface="Nunito Sans"/>
               </a:rPr>
-              <a:t>Letra de una canción inventada: «Sin ti no soy nada. Eres mi media naranja. Te quiero tanto que me muero de celos».</a:t>
+              <a:t>Un chico: «Las chicas y los chicos ya son iguales. Hoy cualquiera puede estudiar lo que quiera».</a:t>
             </a:r>
           </a:p>
         </p:txBody>
@@ -6814,7 +6340,7 @@
                 </a:solidFill>
                 <a:latin typeface="Nunito Sans"/>
               </a:rPr>
-              <a:t>¿Qué ideas sobre el amor hay en esa letra? ¿Son verdad?</a:t>
+              <a:t>¿Qué tendrías que mirar para saber si tiene razón?</a:t>
             </a:r>
           </a:p>
         </p:txBody>
@@ -6918,7 +6444,7 @@
                 </a:solidFill>
                 <a:latin typeface="Fredoka"/>
               </a:rPr>
-              <a:t>Mitos, roles y control</a:t>
+              <a:t>Diferencia y desigualdad</a:t>
             </a:r>
           </a:p>
         </p:txBody>
@@ -6983,7 +6509,7 @@
                 </a:solidFill>
                 <a:latin typeface="Nunito Sans"/>
               </a:rPr>
-              <a:t>BLOQUE 1 · MITOS, ROLES Y CONTROL</a:t>
+              <a:t>BLOQUE 1 · DIFERENCIA Y DESIGUALDAD</a:t>
             </a:r>
           </a:p>
         </p:txBody>
@@ -7022,252 +6548,242 @@
                 </a:solidFill>
                 <a:latin typeface="Fredoka"/>
               </a:rPr>
-              <a:t>Mito del amor romántico</a:t>
-            </a:r>
-          </a:p>
-        </p:txBody>
-      </p:sp>
-      <p:sp>
-        <p:nvSpPr>
-          <p:cNvPr id="4" name="Rectangle 3"/>
-          <p:cNvSpPr/>
+              <a:t>No es lo mismo</a:t>
+            </a:r>
+          </a:p>
+        </p:txBody>
+      </p:sp>
+      <p:graphicFrame>
+        <p:nvGraphicFramePr>
+          <p:cNvPr id="4" name="Table 3"/>
+          <p:cNvGraphicFramePr>
+            <a:graphicFrameLocks noGrp="1"/>
+          </p:cNvGraphicFramePr>
           <p:nvPr/>
-        </p:nvSpPr>
-        <p:spPr>
-          <a:xfrm>
-            <a:off x="640000" y="1650000"/>
-            <a:ext cx="10912000" cy="1150000"/>
-          </a:xfrm>
-          <a:prstGeom prst="rect">
-            <a:avLst/>
-          </a:prstGeom>
-          <a:solidFill>
-            <a:srgbClr val="EAF0F7"/>
-          </a:solidFill>
-          <a:ln>
-            <a:noFill/>
-          </a:ln>
-        </p:spPr>
-        <p:style>
-          <a:lnRef idx="1">
-            <a:schemeClr val="accent1"/>
-          </a:lnRef>
-          <a:fillRef idx="3">
-            <a:schemeClr val="accent1"/>
-          </a:fillRef>
-          <a:effectRef idx="2">
-            <a:schemeClr val="accent1"/>
-          </a:effectRef>
-          <a:fontRef idx="minor">
-            <a:schemeClr val="lt1"/>
-          </a:fontRef>
-        </p:style>
-        <p:txBody>
-          <a:bodyPr rtlCol="0" anchor="ctr"/>
-          <a:lstStyle/>
-          <a:p>
-            <a:pPr algn="ctr"/>
-          </a:p>
-        </p:txBody>
-      </p:sp>
-      <p:sp>
-        <p:nvSpPr>
-          <p:cNvPr id="5" name="TextBox 4"/>
-          <p:cNvSpPr txBox="1"/>
-          <p:nvPr/>
-        </p:nvSpPr>
-        <p:spPr>
-          <a:xfrm>
-            <a:off x="840000" y="1730000"/>
-            <a:ext cx="10512000" cy="1000000"/>
-          </a:xfrm>
-          <a:prstGeom prst="rect">
-            <a:avLst/>
-          </a:prstGeom>
-          <a:noFill/>
-        </p:spPr>
-        <p:txBody>
-          <a:bodyPr wrap="square" anchor="ctr">
-            <a:spAutoFit/>
-          </a:bodyPr>
-          <a:lstStyle/>
-          <a:p>
-            <a:pPr>
-              <a:spcAft>
-                <a:spcPts val="1260"/>
-              </a:spcAft>
-            </a:pPr>
-            <a:r>
-              <a:rPr sz="2800" b="1">
-                <a:solidFill>
-                  <a:srgbClr val="1F2A44"/>
-                </a:solidFill>
-                <a:latin typeface="Nunito Sans"/>
-              </a:rPr>
-              <a:t>Un </a:t>
-            </a:r>
-            <a:r>
-              <a:rPr sz="2800" b="1">
-                <a:solidFill>
-                  <a:srgbClr val="1F2A44"/>
-                </a:solidFill>
-                <a:latin typeface="Nunito Sans"/>
-              </a:rPr>
-              <a:t>mito</a:t>
-            </a:r>
-            <a:r>
-              <a:rPr sz="2800" b="1">
-                <a:solidFill>
-                  <a:srgbClr val="1F2A44"/>
-                </a:solidFill>
-                <a:latin typeface="Nunito Sans"/>
-              </a:rPr>
-              <a:t> del amor romántico es una creencia sobre el amor que mucha gente da por verdadera, pero es falsa o exagerada.</a:t>
-            </a:r>
-          </a:p>
-        </p:txBody>
-      </p:sp>
-      <p:sp>
-        <p:nvSpPr>
-          <p:cNvPr id="6" name="TextBox 5"/>
-          <p:cNvSpPr txBox="1"/>
-          <p:nvPr/>
-        </p:nvSpPr>
-        <p:spPr>
-          <a:xfrm>
-            <a:off x="640000" y="3000000"/>
-            <a:ext cx="10912000" cy="3458000"/>
-          </a:xfrm>
-          <a:prstGeom prst="rect">
-            <a:avLst/>
-          </a:prstGeom>
-          <a:noFill/>
-        </p:spPr>
-        <p:txBody>
-          <a:bodyPr wrap="square">
-            <a:spAutoFit/>
-          </a:bodyPr>
-          <a:lstStyle/>
-          <a:p>
-            <a:pPr>
-              <a:spcAft>
-                <a:spcPts val="1260"/>
-              </a:spcAft>
-            </a:pPr>
-            <a:r>
-              <a:rPr sz="2800" b="1">
-                <a:solidFill>
-                  <a:srgbClr val="E8793A"/>
-                </a:solidFill>
-                <a:latin typeface="Nunito Sans"/>
-              </a:rPr>
-              <a:t>• </a:t>
-            </a:r>
-            <a:r>
-              <a:rPr sz="2800" b="0">
-                <a:solidFill>
-                  <a:srgbClr val="1F2A44"/>
-                </a:solidFill>
-                <a:latin typeface="Nunito Sans"/>
-              </a:rPr>
-              <a:t>Lo aprendemos de películas, canciones, series y redes</a:t>
-            </a:r>
-          </a:p>
-          <a:p>
-            <a:pPr>
-              <a:spcAft>
-                <a:spcPts val="1260"/>
-              </a:spcAft>
-            </a:pPr>
-            <a:r>
-              <a:rPr sz="2800" b="1">
-                <a:solidFill>
-                  <a:srgbClr val="E8793A"/>
-                </a:solidFill>
-                <a:latin typeface="Nunito Sans"/>
-              </a:rPr>
-              <a:t>• </a:t>
-            </a:r>
-            <a:r>
-              <a:rPr sz="2800" b="0">
-                <a:solidFill>
-                  <a:srgbClr val="1F2A44"/>
-                </a:solidFill>
-                <a:latin typeface="Nunito Sans"/>
-              </a:rPr>
-              <a:t>Lo creemos por </a:t>
-            </a:r>
-            <a:r>
-              <a:rPr sz="2800" b="1">
-                <a:solidFill>
-                  <a:srgbClr val="1F2A44"/>
-                </a:solidFill>
-                <a:latin typeface="Nunito Sans"/>
-              </a:rPr>
-              <a:t>costumbre</a:t>
-            </a:r>
-            <a:r>
-              <a:rPr sz="2800" b="0">
-                <a:solidFill>
-                  <a:srgbClr val="1F2A44"/>
-                </a:solidFill>
-                <a:latin typeface="Nunito Sans"/>
-              </a:rPr>
-              <a:t> y por el grupo (sesión 5)</a:t>
-            </a:r>
-          </a:p>
-          <a:p>
-            <a:pPr>
-              <a:spcAft>
-                <a:spcPts val="1260"/>
-              </a:spcAft>
-            </a:pPr>
-            <a:r>
-              <a:rPr sz="2800" b="1">
-                <a:solidFill>
-                  <a:srgbClr val="E8793A"/>
-                </a:solidFill>
-                <a:latin typeface="Nunito Sans"/>
-              </a:rPr>
-              <a:t>• </a:t>
-            </a:r>
-            <a:r>
-              <a:rPr sz="2800" b="0">
-                <a:solidFill>
-                  <a:srgbClr val="1F2A44"/>
-                </a:solidFill>
-                <a:latin typeface="Nunito Sans"/>
-              </a:rPr>
-              <a:t>La idea de la «otra mitad» ya sale en «El banquete», de Platón</a:t>
-            </a:r>
-          </a:p>
-          <a:p>
-            <a:pPr>
-              <a:spcAft>
-                <a:spcPts val="1260"/>
-              </a:spcAft>
-            </a:pPr>
-            <a:r>
-              <a:rPr sz="2800" b="1">
-                <a:solidFill>
-                  <a:srgbClr val="E8793A"/>
-                </a:solidFill>
-                <a:latin typeface="Nunito Sans"/>
-              </a:rPr>
-              <a:t>• </a:t>
-            </a:r>
-            <a:r>
-              <a:rPr sz="2800" b="0">
-                <a:solidFill>
-                  <a:srgbClr val="1F2A44"/>
-                </a:solidFill>
-                <a:latin typeface="Nunito Sans"/>
-              </a:rPr>
-              <a:t>El psicólogo Carlos Yela los estudió y clasificó en España</a:t>
-            </a:r>
-          </a:p>
-        </p:txBody>
-      </p:sp>
+        </p:nvGraphicFramePr>
+        <p:xfrm>
+          <a:off x="640000" y="1700000"/>
+          <a:ext cx="10912000" cy="1800000"/>
+        </p:xfrm>
+        <a:graphic>
+          <a:graphicData uri="http://schemas.openxmlformats.org/drawingml/2006/table">
+            <a:tbl>
+              <a:tblPr firstRow="1" bandRow="1">
+                <a:tableStyleId>{5C22544A-7EE6-4342-B048-85BDC9FD1C3A}</a:tableStyleId>
+              </a:tblPr>
+              <a:tblGrid>
+                <a:gridCol w="3637333"/>
+                <a:gridCol w="3637333"/>
+                <a:gridCol w="3637334"/>
+              </a:tblGrid>
+              <a:tr h="600000">
+                <a:tc>
+                  <a:txBody>
+                    <a:bodyPr/>
+                    <a:lstStyle/>
+                    <a:p>
+                      <a:r>
+                        <a:rPr sz="2000" b="1">
+                          <a:solidFill>
+                            <a:srgbClr val="FBF7EF"/>
+                          </a:solidFill>
+                          <a:latin typeface="Fredoka"/>
+                        </a:rPr>
+                        <a:t>Palabra</a:t>
+                      </a:r>
+                    </a:p>
+                  </a:txBody>
+                  <a:tcPr>
+                    <a:solidFill>
+                      <a:srgbClr val="1F2A44"/>
+                    </a:solidFill>
+                  </a:tcPr>
+                </a:tc>
+                <a:tc>
+                  <a:txBody>
+                    <a:bodyPr/>
+                    <a:lstStyle/>
+                    <a:p>
+                      <a:r>
+                        <a:rPr sz="2000" b="1">
+                          <a:solidFill>
+                            <a:srgbClr val="FBF7EF"/>
+                          </a:solidFill>
+                          <a:latin typeface="Fredoka"/>
+                        </a:rPr>
+                        <a:t>Qué es</a:t>
+                      </a:r>
+                    </a:p>
+                  </a:txBody>
+                  <a:tcPr>
+                    <a:solidFill>
+                      <a:srgbClr val="1F2A44"/>
+                    </a:solidFill>
+                  </a:tcPr>
+                </a:tc>
+                <a:tc>
+                  <a:txBody>
+                    <a:bodyPr/>
+                    <a:lstStyle/>
+                    <a:p>
+                      <a:r>
+                        <a:rPr sz="2000" b="1">
+                          <a:solidFill>
+                            <a:srgbClr val="FBF7EF"/>
+                          </a:solidFill>
+                          <a:latin typeface="Fredoka"/>
+                        </a:rPr>
+                        <a:t>Ejemplo</a:t>
+                      </a:r>
+                    </a:p>
+                  </a:txBody>
+                  <a:tcPr>
+                    <a:solidFill>
+                      <a:srgbClr val="1F2A44"/>
+                    </a:solidFill>
+                  </a:tcPr>
+                </a:tc>
+              </a:tr>
+              <a:tr h="600000">
+                <a:tc>
+                  <a:txBody>
+                    <a:bodyPr/>
+                    <a:lstStyle/>
+                    <a:p>
+                      <a:r>
+                        <a:rPr sz="2000" b="1">
+                          <a:solidFill>
+                            <a:srgbClr val="1F2A44"/>
+                          </a:solidFill>
+                          <a:latin typeface="Nunito Sans"/>
+                        </a:rPr>
+                        <a:t>Diferencia</a:t>
+                      </a:r>
+                    </a:p>
+                  </a:txBody>
+                  <a:tcPr>
+                    <a:solidFill>
+                      <a:srgbClr val="FFFFFF"/>
+                    </a:solidFill>
+                  </a:tcPr>
+                </a:tc>
+                <a:tc>
+                  <a:txBody>
+                    <a:bodyPr/>
+                    <a:lstStyle/>
+                    <a:p>
+                      <a:r>
+                        <a:rPr sz="2000" b="0">
+                          <a:solidFill>
+                            <a:srgbClr val="1F2A44"/>
+                          </a:solidFill>
+                          <a:latin typeface="Nunito Sans"/>
+                        </a:rPr>
+                        <a:t>Ser distintos en algo</a:t>
+                      </a:r>
+                    </a:p>
+                  </a:txBody>
+                  <a:tcPr>
+                    <a:solidFill>
+                      <a:srgbClr val="FFFFFF"/>
+                    </a:solidFill>
+                  </a:tcPr>
+                </a:tc>
+                <a:tc>
+                  <a:txBody>
+                    <a:bodyPr/>
+                    <a:lstStyle/>
+                    <a:p>
+                      <a:r>
+                        <a:rPr sz="2000" b="0">
+                          <a:solidFill>
+                            <a:srgbClr val="1F2A44"/>
+                          </a:solidFill>
+                          <a:latin typeface="Nunito Sans"/>
+                        </a:rPr>
+                        <a:t>Una chica es alta y un chico, bajito. A otro le gusta bailar.</a:t>
+                      </a:r>
+                    </a:p>
+                  </a:txBody>
+                  <a:tcPr>
+                    <a:solidFill>
+                      <a:srgbClr val="FFFFFF"/>
+                    </a:solidFill>
+                  </a:tcPr>
+                </a:tc>
+              </a:tr>
+              <a:tr h="600000">
+                <a:tc>
+                  <a:txBody>
+                    <a:bodyPr/>
+                    <a:lstStyle/>
+                    <a:p>
+                      <a:r>
+                        <a:rPr sz="2000" b="1">
+                          <a:solidFill>
+                            <a:srgbClr val="1F2A44"/>
+                          </a:solidFill>
+                          <a:latin typeface="Nunito Sans"/>
+                        </a:rPr>
+                        <a:t>Desigualdad</a:t>
+                      </a:r>
+                    </a:p>
+                  </a:txBody>
+                  <a:tcPr>
+                    <a:solidFill>
+                      <a:srgbClr val="EAF0F7"/>
+                    </a:solidFill>
+                  </a:tcPr>
+                </a:tc>
+                <a:tc>
+                  <a:txBody>
+                    <a:bodyPr/>
+                    <a:lstStyle/>
+                    <a:p>
+                      <a:r>
+                        <a:rPr sz="2000" b="0">
+                          <a:solidFill>
+                            <a:srgbClr val="1F2A44"/>
+                          </a:solidFill>
+                          <a:latin typeface="Nunito Sans"/>
+                        </a:rPr>
+                        <a:t>Tener menos derechos u oportunidades por ser de un grupo</a:t>
+                      </a:r>
+                    </a:p>
+                  </a:txBody>
+                  <a:tcPr>
+                    <a:solidFill>
+                      <a:srgbClr val="EAF0F7"/>
+                    </a:solidFill>
+                  </a:tcPr>
+                </a:tc>
+                <a:tc>
+                  <a:txBody>
+                    <a:bodyPr/>
+                    <a:lstStyle/>
+                    <a:p>
+                      <a:r>
+                        <a:rPr sz="2000" b="0">
+                          <a:solidFill>
+                            <a:srgbClr val="1F2A44"/>
+                          </a:solidFill>
+                          <a:latin typeface="Nunito Sans"/>
+                        </a:rPr>
+                        <a:t>No poder votar por ser mujer</a:t>
+                      </a:r>
+                    </a:p>
+                  </a:txBody>
+                  <a:tcPr>
+                    <a:solidFill>
+                      <a:srgbClr val="EAF0F7"/>
+                    </a:solidFill>
+                  </a:tcPr>
+                </a:tc>
+              </a:tr>
+            </a:tbl>
+          </a:graphicData>
+        </a:graphic>
+      </p:graphicFrame>
     </p:spTree>
   </p:cSld>
   <p:clrMapOvr>
@@ -7328,7 +6844,7 @@
                 </a:solidFill>
                 <a:latin typeface="Nunito Sans"/>
               </a:rPr>
-              <a:t>BLOQUE 1 · MITOS, ROLES Y CONTROL</a:t>
+              <a:t>BLOQUE 1 · DIFERENCIA Y DESIGUALDAD</a:t>
             </a:r>
           </a:p>
         </p:txBody>
@@ -7367,432 +6883,218 @@
                 </a:solidFill>
                 <a:latin typeface="Fredoka"/>
               </a:rPr>
-              <a:t>Cuatro mitos y por qué fallan</a:t>
-            </a:r>
-          </a:p>
-        </p:txBody>
-      </p:sp>
-      <p:graphicFrame>
-        <p:nvGraphicFramePr>
-          <p:cNvPr id="4" name="Table 3"/>
-          <p:cNvGraphicFramePr>
-            <a:graphicFrameLocks noGrp="1"/>
-          </p:cNvGraphicFramePr>
+              <a:t>Desigualdad de género</a:t>
+            </a:r>
+          </a:p>
+        </p:txBody>
+      </p:sp>
+      <p:sp>
+        <p:nvSpPr>
+          <p:cNvPr id="4" name="Rectangle 3"/>
+          <p:cNvSpPr/>
           <p:nvPr/>
-        </p:nvGraphicFramePr>
-        <p:xfrm>
-          <a:off x="640000" y="1700000"/>
-          <a:ext cx="10912000" cy="3000000"/>
-        </p:xfrm>
-        <a:graphic>
-          <a:graphicData uri="http://schemas.openxmlformats.org/drawingml/2006/table">
-            <a:tbl>
-              <a:tblPr firstRow="1" bandRow="1">
-                <a:tableStyleId>{5C22544A-7EE6-4342-B048-85BDC9FD1C3A}</a:tableStyleId>
-              </a:tblPr>
-              <a:tblGrid>
-                <a:gridCol w="3637333"/>
-                <a:gridCol w="3637333"/>
-                <a:gridCol w="3637334"/>
-              </a:tblGrid>
-              <a:tr h="600000">
-                <a:tc>
-                  <a:txBody>
-                    <a:bodyPr/>
-                    <a:lstStyle/>
-                    <a:p>
-                      <a:r>
-                        <a:rPr sz="2000" b="1">
-                          <a:solidFill>
-                            <a:srgbClr val="FBF7EF"/>
-                          </a:solidFill>
-                          <a:latin typeface="Fredoka"/>
-                        </a:rPr>
-                        <a:t>Mito</a:t>
-                      </a:r>
-                    </a:p>
-                  </a:txBody>
-                  <a:tcPr>
-                    <a:solidFill>
-                      <a:srgbClr val="1F2A44"/>
-                    </a:solidFill>
-                  </a:tcPr>
-                </a:tc>
-                <a:tc>
-                  <a:txBody>
-                    <a:bodyPr/>
-                    <a:lstStyle/>
-                    <a:p>
-                      <a:r>
-                        <a:rPr sz="2000" b="1">
-                          <a:solidFill>
-                            <a:srgbClr val="FBF7EF"/>
-                          </a:solidFill>
-                          <a:latin typeface="Fredoka"/>
-                        </a:rPr>
-                        <a:t>Qué dice</a:t>
-                      </a:r>
-                    </a:p>
-                  </a:txBody>
-                  <a:tcPr>
-                    <a:solidFill>
-                      <a:srgbClr val="1F2A44"/>
-                    </a:solidFill>
-                  </a:tcPr>
-                </a:tc>
-                <a:tc>
-                  <a:txBody>
-                    <a:bodyPr/>
-                    <a:lstStyle/>
-                    <a:p>
-                      <a:r>
-                        <a:rPr sz="2000" b="1">
-                          <a:solidFill>
-                            <a:srgbClr val="FBF7EF"/>
-                          </a:solidFill>
-                          <a:latin typeface="Fredoka"/>
-                        </a:rPr>
-                        <a:t>Por qué falla</a:t>
-                      </a:r>
-                    </a:p>
-                  </a:txBody>
-                  <a:tcPr>
-                    <a:solidFill>
-                      <a:srgbClr val="1F2A44"/>
-                    </a:solidFill>
-                  </a:tcPr>
-                </a:tc>
-              </a:tr>
-              <a:tr h="600000">
-                <a:tc>
-                  <a:txBody>
-                    <a:bodyPr/>
-                    <a:lstStyle/>
-                    <a:p>
-                      <a:r>
-                        <a:rPr sz="2000" b="0">
-                          <a:solidFill>
-                            <a:srgbClr val="1F2A44"/>
-                          </a:solidFill>
-                          <a:latin typeface="Nunito Sans"/>
-                        </a:rPr>
-                        <a:t>La </a:t>
-                      </a:r>
-                      <a:r>
-                        <a:rPr sz="2000" b="1">
-                          <a:solidFill>
-                            <a:srgbClr val="1F2A44"/>
-                          </a:solidFill>
-                          <a:latin typeface="Nunito Sans"/>
-                        </a:rPr>
-                        <a:t>media naranja</a:t>
-                      </a:r>
-                    </a:p>
-                  </a:txBody>
-                  <a:tcPr>
-                    <a:solidFill>
-                      <a:srgbClr val="FFFFFF"/>
-                    </a:solidFill>
-                  </a:tcPr>
-                </a:tc>
-                <a:tc>
-                  <a:txBody>
-                    <a:bodyPr/>
-                    <a:lstStyle/>
-                    <a:p>
-                      <a:r>
-                        <a:rPr sz="2000" b="0">
-                          <a:solidFill>
-                            <a:srgbClr val="1F2A44"/>
-                          </a:solidFill>
-                          <a:latin typeface="Nunito Sans"/>
-                        </a:rPr>
-                        <a:t>Hay una sola persona hecha para ti</a:t>
-                      </a:r>
-                    </a:p>
-                  </a:txBody>
-                  <a:tcPr>
-                    <a:solidFill>
-                      <a:srgbClr val="FFFFFF"/>
-                    </a:solidFill>
-                  </a:tcPr>
-                </a:tc>
-                <a:tc>
-                  <a:txBody>
-                    <a:bodyPr/>
-                    <a:lstStyle/>
-                    <a:p>
-                      <a:r>
-                        <a:rPr sz="2000" b="0">
-                          <a:solidFill>
-                            <a:srgbClr val="1F2A44"/>
-                          </a:solidFill>
-                          <a:latin typeface="Nunito Sans"/>
-                        </a:rPr>
-                        <a:t>Nadie está a medias; el amor puede llegar más de una vez</a:t>
-                      </a:r>
-                    </a:p>
-                  </a:txBody>
-                  <a:tcPr>
-                    <a:solidFill>
-                      <a:srgbClr val="FFFFFF"/>
-                    </a:solidFill>
-                  </a:tcPr>
-                </a:tc>
-              </a:tr>
-              <a:tr h="600000">
-                <a:tc>
-                  <a:txBody>
-                    <a:bodyPr/>
-                    <a:lstStyle/>
-                    <a:p>
-                      <a:r>
-                        <a:rPr sz="2000" b="0">
-                          <a:solidFill>
-                            <a:srgbClr val="1F2A44"/>
-                          </a:solidFill>
-                          <a:latin typeface="Nunito Sans"/>
-                        </a:rPr>
-                        <a:t>Los </a:t>
-                      </a:r>
-                      <a:r>
-                        <a:rPr sz="2000" b="1">
-                          <a:solidFill>
-                            <a:srgbClr val="1F2A44"/>
-                          </a:solidFill>
-                          <a:latin typeface="Nunito Sans"/>
-                        </a:rPr>
-                        <a:t>celos</a:t>
-                      </a:r>
-                      <a:r>
-                        <a:rPr sz="2000" b="0">
-                          <a:solidFill>
-                            <a:srgbClr val="1F2A44"/>
-                          </a:solidFill>
-                          <a:latin typeface="Nunito Sans"/>
-                        </a:rPr>
-                        <a:t> son amor</a:t>
-                      </a:r>
-                    </a:p>
-                  </a:txBody>
-                  <a:tcPr>
-                    <a:solidFill>
-                      <a:srgbClr val="EAF0F7"/>
-                    </a:solidFill>
-                  </a:tcPr>
-                </a:tc>
-                <a:tc>
-                  <a:txBody>
-                    <a:bodyPr/>
-                    <a:lstStyle/>
-                    <a:p>
-                      <a:r>
-                        <a:rPr sz="2000" b="0">
-                          <a:solidFill>
-                            <a:srgbClr val="1F2A44"/>
-                          </a:solidFill>
-                          <a:latin typeface="Nunito Sans"/>
-                        </a:rPr>
-                        <a:t>Si tiene celos, es que te quiere</a:t>
-                      </a:r>
-                    </a:p>
-                  </a:txBody>
-                  <a:tcPr>
-                    <a:solidFill>
-                      <a:srgbClr val="EAF0F7"/>
-                    </a:solidFill>
-                  </a:tcPr>
-                </a:tc>
-                <a:tc>
-                  <a:txBody>
-                    <a:bodyPr/>
-                    <a:lstStyle/>
-                    <a:p>
-                      <a:r>
-                        <a:rPr sz="2000" b="0">
-                          <a:solidFill>
-                            <a:srgbClr val="1F2A44"/>
-                          </a:solidFill>
-                          <a:latin typeface="Nunito Sans"/>
-                        </a:rPr>
-                        <a:t>Los celos hablan de miedo e inseguridad, no de cuánto quiere</a:t>
-                      </a:r>
-                    </a:p>
-                  </a:txBody>
-                  <a:tcPr>
-                    <a:solidFill>
-                      <a:srgbClr val="EAF0F7"/>
-                    </a:solidFill>
-                  </a:tcPr>
-                </a:tc>
-              </a:tr>
-              <a:tr h="600000">
-                <a:tc>
-                  <a:txBody>
-                    <a:bodyPr/>
-                    <a:lstStyle/>
-                    <a:p>
-                      <a:r>
-                        <a:rPr sz="2000" b="0">
-                          <a:solidFill>
-                            <a:srgbClr val="1F2A44"/>
-                          </a:solidFill>
-                          <a:latin typeface="Nunito Sans"/>
-                        </a:rPr>
-                        <a:t>El amor </a:t>
-                      </a:r>
-                      <a:r>
-                        <a:rPr sz="2000" b="1">
-                          <a:solidFill>
-                            <a:srgbClr val="1F2A44"/>
-                          </a:solidFill>
-                          <a:latin typeface="Nunito Sans"/>
-                        </a:rPr>
-                        <a:t>lo puede todo</a:t>
-                      </a:r>
-                    </a:p>
-                  </a:txBody>
-                  <a:tcPr>
-                    <a:solidFill>
-                      <a:srgbClr val="FFFFFF"/>
-                    </a:solidFill>
-                  </a:tcPr>
-                </a:tc>
-                <a:tc>
-                  <a:txBody>
-                    <a:bodyPr/>
-                    <a:lstStyle/>
-                    <a:p>
-                      <a:r>
-                        <a:rPr sz="2000" b="0">
-                          <a:solidFill>
-                            <a:srgbClr val="1F2A44"/>
-                          </a:solidFill>
-                          <a:latin typeface="Nunito Sans"/>
-                        </a:rPr>
-                        <a:t>Si os queréis, todo se arregla</a:t>
-                      </a:r>
-                    </a:p>
-                  </a:txBody>
-                  <a:tcPr>
-                    <a:solidFill>
-                      <a:srgbClr val="FFFFFF"/>
-                    </a:solidFill>
-                  </a:tcPr>
-                </a:tc>
-                <a:tc>
-                  <a:txBody>
-                    <a:bodyPr/>
-                    <a:lstStyle/>
-                    <a:p>
-                      <a:r>
-                        <a:rPr sz="2000" b="0">
-                          <a:solidFill>
-                            <a:srgbClr val="1F2A44"/>
-                          </a:solidFill>
-                          <a:latin typeface="Nunito Sans"/>
-                        </a:rPr>
-                        <a:t>Querer no basta si hay faltas de respeto o daño</a:t>
-                      </a:r>
-                    </a:p>
-                  </a:txBody>
-                  <a:tcPr>
-                    <a:solidFill>
-                      <a:srgbClr val="FFFFFF"/>
-                    </a:solidFill>
-                  </a:tcPr>
-                </a:tc>
-              </a:tr>
-              <a:tr h="600000">
-                <a:tc>
-                  <a:txBody>
-                    <a:bodyPr/>
-                    <a:lstStyle/>
-                    <a:p>
-                      <a:r>
-                        <a:rPr sz="2000" b="0">
-                          <a:solidFill>
-                            <a:srgbClr val="1F2A44"/>
-                          </a:solidFill>
-                          <a:latin typeface="Nunito Sans"/>
-                        </a:rPr>
-                        <a:t>«Si me quiere, me enseña el </a:t>
-                      </a:r>
-                      <a:r>
-                        <a:rPr sz="2000" b="1">
-                          <a:solidFill>
-                            <a:srgbClr val="1F2A44"/>
-                          </a:solidFill>
-                          <a:latin typeface="Nunito Sans"/>
-                        </a:rPr>
-                        <a:t>móvil</a:t>
-                      </a:r>
-                      <a:r>
-                        <a:rPr sz="2000" b="0">
-                          <a:solidFill>
-                            <a:srgbClr val="1F2A44"/>
-                          </a:solidFill>
-                          <a:latin typeface="Nunito Sans"/>
-                        </a:rPr>
-                        <a:t>»</a:t>
-                      </a:r>
-                    </a:p>
-                  </a:txBody>
-                  <a:tcPr>
-                    <a:solidFill>
-                      <a:srgbClr val="EAF0F7"/>
-                    </a:solidFill>
-                  </a:tcPr>
-                </a:tc>
-                <a:tc>
-                  <a:txBody>
-                    <a:bodyPr/>
-                    <a:lstStyle/>
-                    <a:p>
-                      <a:r>
-                        <a:rPr sz="2000" b="0">
-                          <a:solidFill>
-                            <a:srgbClr val="1F2A44"/>
-                          </a:solidFill>
-                          <a:latin typeface="Nunito Sans"/>
-                        </a:rPr>
-                        <a:t>Quien ama no tiene secretos</a:t>
-                      </a:r>
-                    </a:p>
-                  </a:txBody>
-                  <a:tcPr>
-                    <a:solidFill>
-                      <a:srgbClr val="EAF0F7"/>
-                    </a:solidFill>
-                  </a:tcPr>
-                </a:tc>
-                <a:tc>
-                  <a:txBody>
-                    <a:bodyPr/>
-                    <a:lstStyle/>
-                    <a:p>
-                      <a:r>
-                        <a:rPr sz="2000" b="0">
-                          <a:solidFill>
-                            <a:srgbClr val="1F2A44"/>
-                          </a:solidFill>
-                          <a:latin typeface="Nunito Sans"/>
-                        </a:rPr>
-                        <a:t>Cada uno tiene derecho a su intimidad, también en pareja</a:t>
-                      </a:r>
-                    </a:p>
-                  </a:txBody>
-                  <a:tcPr>
-                    <a:solidFill>
-                      <a:srgbClr val="EAF0F7"/>
-                    </a:solidFill>
-                  </a:tcPr>
-                </a:tc>
-              </a:tr>
-            </a:tbl>
-          </a:graphicData>
-        </a:graphic>
-      </p:graphicFrame>
+        </p:nvSpPr>
+        <p:spPr>
+          <a:xfrm>
+            <a:off x="640000" y="1650000"/>
+            <a:ext cx="10912000" cy="1150000"/>
+          </a:xfrm>
+          <a:prstGeom prst="rect">
+            <a:avLst/>
+          </a:prstGeom>
+          <a:solidFill>
+            <a:srgbClr val="EAF0F7"/>
+          </a:solidFill>
+          <a:ln>
+            <a:noFill/>
+          </a:ln>
+        </p:spPr>
+        <p:style>
+          <a:lnRef idx="1">
+            <a:schemeClr val="accent1"/>
+          </a:lnRef>
+          <a:fillRef idx="3">
+            <a:schemeClr val="accent1"/>
+          </a:fillRef>
+          <a:effectRef idx="2">
+            <a:schemeClr val="accent1"/>
+          </a:effectRef>
+          <a:fontRef idx="minor">
+            <a:schemeClr val="lt1"/>
+          </a:fontRef>
+        </p:style>
+        <p:txBody>
+          <a:bodyPr rtlCol="0" anchor="ctr"/>
+          <a:lstStyle/>
+          <a:p>
+            <a:pPr algn="ctr"/>
+          </a:p>
+        </p:txBody>
+      </p:sp>
+      <p:sp>
+        <p:nvSpPr>
+          <p:cNvPr id="5" name="TextBox 4"/>
+          <p:cNvSpPr txBox="1"/>
+          <p:nvPr/>
+        </p:nvSpPr>
+        <p:spPr>
+          <a:xfrm>
+            <a:off x="840000" y="1730000"/>
+            <a:ext cx="10512000" cy="1000000"/>
+          </a:xfrm>
+          <a:prstGeom prst="rect">
+            <a:avLst/>
+          </a:prstGeom>
+          <a:noFill/>
+        </p:spPr>
+        <p:txBody>
+          <a:bodyPr wrap="square" anchor="ctr">
+            <a:spAutoFit/>
+          </a:bodyPr>
+          <a:lstStyle/>
+          <a:p>
+            <a:pPr>
+              <a:spcAft>
+                <a:spcPts val="1260"/>
+              </a:spcAft>
+            </a:pPr>
+            <a:r>
+              <a:rPr sz="2800" b="1">
+                <a:solidFill>
+                  <a:srgbClr val="1F2A44"/>
+                </a:solidFill>
+                <a:latin typeface="Nunito Sans"/>
+              </a:rPr>
+              <a:t>Es cuando hombres y mujeres no tienen los mismos derechos, oportunidades o trato solo por ser hombres o mujeres.</a:t>
+            </a:r>
+          </a:p>
+        </p:txBody>
+      </p:sp>
+      <p:sp>
+        <p:nvSpPr>
+          <p:cNvPr id="6" name="TextBox 5"/>
+          <p:cNvSpPr txBox="1"/>
+          <p:nvPr/>
+        </p:nvSpPr>
+        <p:spPr>
+          <a:xfrm>
+            <a:off x="640000" y="3000000"/>
+            <a:ext cx="10912000" cy="3458000"/>
+          </a:xfrm>
+          <a:prstGeom prst="rect">
+            <a:avLst/>
+          </a:prstGeom>
+          <a:noFill/>
+        </p:spPr>
+        <p:txBody>
+          <a:bodyPr wrap="square">
+            <a:spAutoFit/>
+          </a:bodyPr>
+          <a:lstStyle/>
+          <a:p>
+            <a:pPr>
+              <a:spcAft>
+                <a:spcPts val="1260"/>
+              </a:spcAft>
+            </a:pPr>
+            <a:r>
+              <a:rPr sz="2800" b="1">
+                <a:solidFill>
+                  <a:srgbClr val="E8793A"/>
+                </a:solidFill>
+                <a:latin typeface="Nunito Sans"/>
+              </a:rPr>
+              <a:t>• </a:t>
+            </a:r>
+            <a:r>
+              <a:rPr sz="2800" b="1">
+                <a:solidFill>
+                  <a:srgbClr val="1F2A44"/>
+                </a:solidFill>
+                <a:latin typeface="Nunito Sans"/>
+              </a:rPr>
+              <a:t>Diferentes, pero iguales:</a:t>
+            </a:r>
+            <a:r>
+              <a:rPr sz="2800" b="0">
+                <a:solidFill>
+                  <a:srgbClr val="1F2A44"/>
+                </a:solidFill>
+                <a:latin typeface="Nunito Sans"/>
+              </a:rPr>
+              <a:t> en derechos y en dignidad</a:t>
+            </a:r>
+          </a:p>
+          <a:p>
+            <a:pPr>
+              <a:spcAft>
+                <a:spcPts val="1260"/>
+              </a:spcAft>
+            </a:pPr>
+            <a:r>
+              <a:rPr sz="2800" b="1">
+                <a:solidFill>
+                  <a:srgbClr val="E8793A"/>
+                </a:solidFill>
+                <a:latin typeface="Nunito Sans"/>
+              </a:rPr>
+              <a:t>• </a:t>
+            </a:r>
+            <a:r>
+              <a:rPr sz="2800" b="0">
+                <a:solidFill>
+                  <a:srgbClr val="1F2A44"/>
+                </a:solidFill>
+                <a:latin typeface="Nunito Sans"/>
+              </a:rPr>
+              <a:t>En España, las mujeres votaron por primera vez en </a:t>
+            </a:r>
+            <a:r>
+              <a:rPr sz="2800" b="1">
+                <a:solidFill>
+                  <a:srgbClr val="1F2A44"/>
+                </a:solidFill>
+                <a:latin typeface="Nunito Sans"/>
+              </a:rPr>
+              <a:t>1933</a:t>
+            </a:r>
+          </a:p>
+          <a:p>
+            <a:pPr>
+              <a:spcAft>
+                <a:spcPts val="1260"/>
+              </a:spcAft>
+            </a:pPr>
+            <a:r>
+              <a:rPr sz="2800" b="1">
+                <a:solidFill>
+                  <a:srgbClr val="E8793A"/>
+                </a:solidFill>
+                <a:latin typeface="Nunito Sans"/>
+              </a:rPr>
+              <a:t>• </a:t>
+            </a:r>
+            <a:r>
+              <a:rPr sz="2800" b="0">
+                <a:solidFill>
+                  <a:srgbClr val="1F2A44"/>
+                </a:solidFill>
+                <a:latin typeface="Nunito Sans"/>
+              </a:rPr>
+              <a:t>Una ley igual no basta: hay que mirar la </a:t>
+            </a:r>
+            <a:r>
+              <a:rPr sz="2800" b="1">
+                <a:solidFill>
+                  <a:srgbClr val="1F2A44"/>
+                </a:solidFill>
+                <a:latin typeface="Nunito Sans"/>
+              </a:rPr>
+              <a:t>vida real</a:t>
+            </a:r>
+          </a:p>
+        </p:txBody>
+      </p:sp>
     </p:spTree>
   </p:cSld>
   <p:clrMapOvr>
@@ -7853,7 +7155,7 @@
                 </a:solidFill>
                 <a:latin typeface="Nunito Sans"/>
               </a:rPr>
-              <a:t>BLOQUE 1 · MITOS, ROLES Y CONTROL</a:t>
+              <a:t>BLOQUE 1 · DIFERENCIA Y DESIGUALDAD</a:t>
             </a:r>
           </a:p>
         </p:txBody>
@@ -7892,7 +7194,7 @@
                 </a:solidFill>
                 <a:latin typeface="Fredoka"/>
               </a:rPr>
-              <a:t>Roles de género en las relaciones</a:t>
+              <a:t>Algunos datos reales</a:t>
             </a:r>
           </a:p>
         </p:txBody>
@@ -7931,7 +7233,25 @@
                 </a:solidFill>
                 <a:latin typeface="Nunito Sans"/>
               </a:rPr>
-              <a:t>Ideas fijas sobre cómo «deben» ser los chicos y las chicas en pareja:</a:t>
+              <a:t>Datos oficiales sobre España (</a:t>
+            </a:r>
+            <a:r>
+              <a:rPr sz="2400" b="1">
+                <a:solidFill>
+                  <a:srgbClr val="1F2A44"/>
+                </a:solidFill>
+                <a:latin typeface="Nunito Sans"/>
+              </a:rPr>
+              <a:t>INE</a:t>
+            </a:r>
+            <a:r>
+              <a:rPr sz="2400" b="0">
+                <a:solidFill>
+                  <a:srgbClr val="1F2A44"/>
+                </a:solidFill>
+                <a:latin typeface="Nunito Sans"/>
+              </a:rPr>
+              <a:t> y Seguridad Social):</a:t>
             </a:r>
           </a:p>
         </p:txBody>
@@ -7973,13 +7293,22 @@
               <a:t>• </a:t>
             </a:r>
             <a:r>
+              <a:rPr sz="2800" b="1">
+                <a:solidFill>
+                  <a:srgbClr val="1F2A44"/>
+                </a:solidFill>
+                <a:latin typeface="Nunito Sans"/>
+              </a:rPr>
+              <a:t>Sueldo:</a:t>
+            </a:r>
+            <a:r>
               <a:rPr sz="2800" b="0">
                 <a:solidFill>
                   <a:srgbClr val="1F2A44"/>
                 </a:solidFill>
                 <a:latin typeface="Nunito Sans"/>
               </a:rPr>
-              <a:t>«Él protege y decide; ella espera y cede»</a:t>
+              <a:t> de media, las mujeres cobran menos al año que los hombres</a:t>
             </a:r>
           </a:p>
           <a:p>
@@ -7998,13 +7327,22 @@
               <a:t>• </a:t>
             </a:r>
             <a:r>
+              <a:rPr sz="2800" b="1">
+                <a:solidFill>
+                  <a:srgbClr val="1F2A44"/>
+                </a:solidFill>
+                <a:latin typeface="Nunito Sans"/>
+              </a:rPr>
+              <a:t>Jornada parcial:</a:t>
+            </a:r>
+            <a:r>
               <a:rPr sz="2800" b="0">
                 <a:solidFill>
                   <a:srgbClr val="1F2A44"/>
                 </a:solidFill>
                 <a:latin typeface="Nunito Sans"/>
               </a:rPr>
-              <a:t>«Si un chico llora o pide ayuda, es débil»</a:t>
+              <a:t> la tienen muchas más mujeres que hombres</a:t>
             </a:r>
           </a:p>
           <a:p>
@@ -8023,31 +7361,22 @@
               <a:t>• </a:t>
             </a:r>
             <a:r>
+              <a:rPr sz="2800" b="1">
+                <a:solidFill>
+                  <a:srgbClr val="1F2A44"/>
+                </a:solidFill>
+                <a:latin typeface="Nunito Sans"/>
+              </a:rPr>
+              <a:t>Tiempo:</a:t>
+            </a:r>
+            <a:r>
               <a:rPr sz="2800" b="0">
                 <a:solidFill>
                   <a:srgbClr val="1F2A44"/>
                 </a:solidFill>
                 <a:latin typeface="Nunito Sans"/>
               </a:rPr>
-              <a:t>Son </a:t>
-            </a:r>
-            <a:r>
-              <a:rPr sz="2800" b="1">
-                <a:solidFill>
-                  <a:srgbClr val="1F2A44"/>
-                </a:solidFill>
-                <a:latin typeface="Nunito Sans"/>
-              </a:rPr>
-              <a:t>estereotipos</a:t>
-            </a:r>
-            <a:r>
-              <a:rPr sz="2800" b="0">
-                <a:solidFill>
-                  <a:srgbClr val="1F2A44"/>
-                </a:solidFill>
-                <a:latin typeface="Nunito Sans"/>
-              </a:rPr>
-              <a:t> (sesión 45): no describen a las personas reales</a:t>
+              <a:t> las mujeres dedican más horas a la casa y a cuidar</a:t>
             </a:r>
           </a:p>
           <a:p>
@@ -8066,13 +7395,22 @@
               <a:t>• </a:t>
             </a:r>
             <a:r>
+              <a:rPr sz="2800" b="1">
+                <a:solidFill>
+                  <a:srgbClr val="1F2A44"/>
+                </a:solidFill>
+                <a:latin typeface="Nunito Sans"/>
+              </a:rPr>
+              <a:t>Cuidar a los hijos:</a:t>
+            </a:r>
+            <a:r>
               <a:rPr sz="2800" b="0">
                 <a:solidFill>
                   <a:srgbClr val="1F2A44"/>
                 </a:solidFill>
                 <a:latin typeface="Nunito Sans"/>
               </a:rPr>
-              <a:t>Hay muchas formas de relación, y no tener pareja también es una opción</a:t>
+              <a:t> la gran mayoría de quienes piden excedencia son mujeres</a:t>
             </a:r>
           </a:p>
         </p:txBody>
@@ -8137,7 +7475,7 @@
                 </a:solidFill>
                 <a:latin typeface="Nunito Sans"/>
               </a:rPr>
-              <a:t>BLOQUE 1 · MITOS, ROLES Y CONTROL</a:t>
+              <a:t>BLOQUE 1 · DIFERENCIA Y DESIGUALDAD</a:t>
             </a:r>
           </a:p>
         </p:txBody>
@@ -8176,7 +7514,7 @@
                 </a:solidFill>
                 <a:latin typeface="Fredoka"/>
               </a:rPr>
-              <a:t>Control disfrazado de cariño</a:t>
+              <a:t>El 8 de marzo</a:t>
             </a:r>
           </a:p>
         </p:txBody>
@@ -8258,25 +7596,7 @@
                 </a:solidFill>
                 <a:latin typeface="Nunito Sans"/>
               </a:rPr>
-              <a:t>Es </a:t>
-            </a:r>
-            <a:r>
-              <a:rPr sz="2800" b="1">
-                <a:solidFill>
-                  <a:srgbClr val="1F2A44"/>
-                </a:solidFill>
-                <a:latin typeface="Nunito Sans"/>
-              </a:rPr>
-              <a:t>control</a:t>
-            </a:r>
-            <a:r>
-              <a:rPr sz="2800" b="1">
-                <a:solidFill>
-                  <a:srgbClr val="1F2A44"/>
-                </a:solidFill>
-                <a:latin typeface="Nunito Sans"/>
-              </a:rPr>
-              <a:t> cuando alguien vigila o limita a su pareja y lo presenta como amor o preocupación.</a:t>
+              <a:t>Es el Día Internacional de la Mujer. Recuerda la lucha por la igualdad de derechos entre mujeres y hombres.</a:t>
             </a:r>
           </a:p>
         </p:txBody>
@@ -8324,7 +7644,25 @@
                 </a:solidFill>
                 <a:latin typeface="Nunito Sans"/>
               </a:rPr>
-              <a:t>Pedir la ubicación o «¿con quién estás?» a todas horas</a:t>
+              <a:t>Nace de las protestas de </a:t>
+            </a:r>
+            <a:r>
+              <a:rPr sz="2800" b="1">
+                <a:solidFill>
+                  <a:srgbClr val="1F2A44"/>
+                </a:solidFill>
+                <a:latin typeface="Nunito Sans"/>
+              </a:rPr>
+              <a:t>mujeres trabajadoras</a:t>
+            </a:r>
+            <a:r>
+              <a:rPr sz="2800" b="0">
+                <a:solidFill>
+                  <a:srgbClr val="1F2A44"/>
+                </a:solidFill>
+                <a:latin typeface="Nunito Sans"/>
+              </a:rPr>
+              <a:t> a principios del siglo XX</a:t>
             </a:r>
           </a:p>
           <a:p>
@@ -8349,7 +7687,34 @@
                 </a:solidFill>
                 <a:latin typeface="Nunito Sans"/>
               </a:rPr>
-              <a:t>Decidir con quién quedas o qué ropa llevas</a:t>
+              <a:t>La </a:t>
+            </a:r>
+            <a:r>
+              <a:rPr sz="2800" b="1">
+                <a:solidFill>
+                  <a:srgbClr val="1F2A44"/>
+                </a:solidFill>
+                <a:latin typeface="Nunito Sans"/>
+              </a:rPr>
+              <a:t>ONU</a:t>
+            </a:r>
+            <a:r>
+              <a:rPr sz="2800" b="0">
+                <a:solidFill>
+                  <a:srgbClr val="1F2A44"/>
+                </a:solidFill>
+                <a:latin typeface="Nunito Sans"/>
+              </a:rPr>
+              <a:t> lo celebra oficialmente desde </a:t>
+            </a:r>
+            <a:r>
+              <a:rPr sz="2800" b="1">
+                <a:solidFill>
+                  <a:srgbClr val="1F2A44"/>
+                </a:solidFill>
+                <a:latin typeface="Nunito Sans"/>
+              </a:rPr>
+              <a:t>1975</a:t>
             </a:r>
           </a:p>
           <a:p>
@@ -8374,32 +7739,16 @@
                 </a:solidFill>
                 <a:latin typeface="Nunito Sans"/>
               </a:rPr>
-              <a:t>Pedir contraseñas o revisar el móvil</a:t>
-            </a:r>
-          </a:p>
-          <a:p>
-            <a:pPr>
-              <a:spcAft>
-                <a:spcPts val="1260"/>
-              </a:spcAft>
-            </a:pPr>
+              <a:t>No es un día contra los hombres, sino </a:t>
+            </a:r>
             <a:r>
               <a:rPr sz="2800" b="1">
                 <a:solidFill>
-                  <a:srgbClr val="E8793A"/>
-                </a:solidFill>
-                <a:latin typeface="Nunito Sans"/>
-              </a:rPr>
-              <a:t>• </a:t>
-            </a:r>
-            <a:r>
-              <a:rPr sz="2800" b="0">
-                <a:solidFill>
                   <a:srgbClr val="1F2A44"/>
                 </a:solidFill>
                 <a:latin typeface="Nunito Sans"/>
               </a:rPr>
-              <a:t>Enfadarse si no contestas enseguida</a:t>
+              <a:t>por la igualdad</a:t>
             </a:r>
           </a:p>
         </p:txBody>
